--- a/training/slides/Module_06_Analysis.pptx
+++ b/training/slides/Module_06_Analysis.pptx
@@ -17,7 +17,6 @@
     <p:sldId id="265" r:id="rId16"/>
     <p:sldId id="266" r:id="rId17"/>
     <p:sldId id="267" r:id="rId18"/>
-    <p:sldId id="268" r:id="rId19"/>
   </p:sldIdLst>
   <p:sldSz cx="12191695" cy="6858000" type="screen4x3"/>
   <p:notesSz cx="6858000" cy="9144000"/>
@@ -3096,7 +3095,7 @@
     <p:bg>
       <p:bgPr>
         <a:solidFill>
-          <a:srgbClr val="1A1A2E"/>
+          <a:srgbClr val="1E1B4B"/>
         </a:solidFill>
         <a:effectLst/>
       </p:bgPr>
@@ -3117,13 +3116,13 @@
         <p:spPr>
           <a:xfrm>
             <a:off x="0" y="0"/>
-            <a:ext cx="137160" cy="6858000"/>
+            <a:ext cx="5943600" cy="6858000"/>
           </a:xfrm>
           <a:prstGeom prst="rect">
             <a:avLst/>
           </a:prstGeom>
           <a:solidFill>
-            <a:srgbClr val="007BFF"/>
+            <a:srgbClr val="1E1B4B"/>
           </a:solidFill>
           <a:ln>
             <a:noFill/>
@@ -3153,50 +3152,288 @@
       </p:sp>
       <p:sp>
         <p:nvSpPr>
-          <p:cNvPr id="3" name="TextBox 2"/>
+          <p:cNvPr id="3" name="Rectangle 2"/>
+          <p:cNvSpPr/>
+          <p:nvPr/>
+        </p:nvSpPr>
+        <p:spPr>
+          <a:xfrm>
+            <a:off x="5943600" y="0"/>
+            <a:ext cx="3200400" cy="6858000"/>
+          </a:xfrm>
+          <a:prstGeom prst="rect">
+            <a:avLst/>
+          </a:prstGeom>
+          <a:solidFill>
+            <a:srgbClr val="312E81"/>
+          </a:solidFill>
+          <a:ln>
+            <a:noFill/>
+          </a:ln>
+        </p:spPr>
+        <p:style>
+          <a:lnRef idx="1">
+            <a:schemeClr val="accent1"/>
+          </a:lnRef>
+          <a:fillRef idx="3">
+            <a:schemeClr val="accent1"/>
+          </a:fillRef>
+          <a:effectRef idx="2">
+            <a:schemeClr val="accent1"/>
+          </a:effectRef>
+          <a:fontRef idx="minor">
+            <a:schemeClr val="lt1"/>
+          </a:fontRef>
+        </p:style>
+        <p:txBody>
+          <a:bodyPr rtlCol="0" anchor="ctr"/>
+          <a:lstStyle/>
+          <a:p>
+            <a:pPr algn="ctr"/>
+          </a:p>
+        </p:txBody>
+      </p:sp>
+      <p:sp>
+        <p:nvSpPr>
+          <p:cNvPr id="4" name="Rectangle 3"/>
+          <p:cNvSpPr/>
+          <p:nvPr/>
+        </p:nvSpPr>
+        <p:spPr>
+          <a:xfrm>
+            <a:off x="9144000" y="0"/>
+            <a:ext cx="3047695" cy="6858000"/>
+          </a:xfrm>
+          <a:prstGeom prst="rect">
+            <a:avLst/>
+          </a:prstGeom>
+          <a:solidFill>
+            <a:srgbClr val="4338CA"/>
+          </a:solidFill>
+          <a:ln>
+            <a:noFill/>
+          </a:ln>
+        </p:spPr>
+        <p:style>
+          <a:lnRef idx="1">
+            <a:schemeClr val="accent1"/>
+          </a:lnRef>
+          <a:fillRef idx="3">
+            <a:schemeClr val="accent1"/>
+          </a:fillRef>
+          <a:effectRef idx="2">
+            <a:schemeClr val="accent1"/>
+          </a:effectRef>
+          <a:fontRef idx="minor">
+            <a:schemeClr val="lt1"/>
+          </a:fontRef>
+        </p:style>
+        <p:txBody>
+          <a:bodyPr rtlCol="0" anchor="ctr"/>
+          <a:lstStyle/>
+          <a:p>
+            <a:pPr algn="ctr"/>
+          </a:p>
+        </p:txBody>
+      </p:sp>
+      <p:sp>
+        <p:nvSpPr>
+          <p:cNvPr id="5" name="Rectangle 4"/>
+          <p:cNvSpPr/>
+          <p:nvPr/>
+        </p:nvSpPr>
+        <p:spPr>
+          <a:xfrm>
+            <a:off x="0" y="0"/>
+            <a:ext cx="73152" cy="6858000"/>
+          </a:xfrm>
+          <a:prstGeom prst="rect">
+            <a:avLst/>
+          </a:prstGeom>
+          <a:solidFill>
+            <a:srgbClr val="6366F1"/>
+          </a:solidFill>
+          <a:ln>
+            <a:noFill/>
+          </a:ln>
+        </p:spPr>
+        <p:style>
+          <a:lnRef idx="1">
+            <a:schemeClr val="accent1"/>
+          </a:lnRef>
+          <a:fillRef idx="3">
+            <a:schemeClr val="accent1"/>
+          </a:fillRef>
+          <a:effectRef idx="2">
+            <a:schemeClr val="accent1"/>
+          </a:effectRef>
+          <a:fontRef idx="minor">
+            <a:schemeClr val="lt1"/>
+          </a:fontRef>
+        </p:style>
+        <p:txBody>
+          <a:bodyPr rtlCol="0" anchor="ctr"/>
+          <a:lstStyle/>
+          <a:p>
+            <a:pPr algn="ctr"/>
+          </a:p>
+        </p:txBody>
+      </p:sp>
+      <p:sp>
+        <p:nvSpPr>
+          <p:cNvPr id="6" name="Oval 5"/>
+          <p:cNvSpPr/>
+          <p:nvPr/>
+        </p:nvSpPr>
+        <p:spPr>
+          <a:xfrm>
+            <a:off x="8229600" y="-914400"/>
+            <a:ext cx="4572000" cy="4572000"/>
+          </a:xfrm>
+          <a:prstGeom prst="ellipse">
+            <a:avLst/>
+          </a:prstGeom>
+          <a:solidFill>
+            <a:srgbClr val="6366F1">
+              <a:lumMod val="70000"/>
+              <a:lumOff val="30000"/>
+            </a:srgbClr>
+          </a:solidFill>
+          <a:ln>
+            <a:noFill/>
+          </a:ln>
+        </p:spPr>
+        <p:style>
+          <a:lnRef idx="1">
+            <a:schemeClr val="accent1"/>
+          </a:lnRef>
+          <a:fillRef idx="3">
+            <a:schemeClr val="accent1"/>
+          </a:fillRef>
+          <a:effectRef idx="2">
+            <a:schemeClr val="accent1"/>
+          </a:effectRef>
+          <a:fontRef idx="minor">
+            <a:schemeClr val="lt1"/>
+          </a:fontRef>
+        </p:style>
+        <p:txBody>
+          <a:bodyPr rtlCol="0" anchor="ctr"/>
+          <a:lstStyle/>
+          <a:p>
+            <a:pPr algn="ctr"/>
+          </a:p>
+        </p:txBody>
+      </p:sp>
+      <p:sp>
+        <p:nvSpPr>
+          <p:cNvPr id="7" name="Oval 6"/>
+          <p:cNvSpPr/>
+          <p:nvPr/>
+        </p:nvSpPr>
+        <p:spPr>
+          <a:xfrm>
+            <a:off x="-914400" y="3657600"/>
+            <a:ext cx="3657600" cy="3657600"/>
+          </a:xfrm>
+          <a:prstGeom prst="ellipse">
+            <a:avLst/>
+          </a:prstGeom>
+          <a:solidFill>
+            <a:srgbClr val="5046E5">
+              <a:lumMod val="60000"/>
+              <a:lumOff val="40000"/>
+            </a:srgbClr>
+          </a:solidFill>
+          <a:ln>
+            <a:noFill/>
+          </a:ln>
+        </p:spPr>
+        <p:style>
+          <a:lnRef idx="1">
+            <a:schemeClr val="accent1"/>
+          </a:lnRef>
+          <a:fillRef idx="3">
+            <a:schemeClr val="accent1"/>
+          </a:fillRef>
+          <a:effectRef idx="2">
+            <a:schemeClr val="accent1"/>
+          </a:effectRef>
+          <a:fontRef idx="minor">
+            <a:schemeClr val="lt1"/>
+          </a:fontRef>
+        </p:style>
+        <p:txBody>
+          <a:bodyPr rtlCol="0" anchor="ctr"/>
+          <a:lstStyle/>
+          <a:p>
+            <a:pPr algn="ctr"/>
+          </a:p>
+        </p:txBody>
+      </p:sp>
+      <p:sp>
+        <p:nvSpPr>
+          <p:cNvPr id="8" name="Rounded Rectangle 7"/>
+          <p:cNvSpPr/>
+          <p:nvPr/>
+        </p:nvSpPr>
+        <p:spPr>
+          <a:xfrm>
+            <a:off x="914400" y="1371600"/>
+            <a:ext cx="2377440" cy="438912"/>
+          </a:xfrm>
+          <a:prstGeom prst="roundRect">
+            <a:avLst/>
+          </a:prstGeom>
+          <a:solidFill>
+            <a:srgbClr val="312E81"/>
+          </a:solidFill>
+          <a:ln>
+            <a:noFill/>
+          </a:ln>
+        </p:spPr>
+        <p:style>
+          <a:lnRef idx="1">
+            <a:schemeClr val="accent1"/>
+          </a:lnRef>
+          <a:fillRef idx="3">
+            <a:schemeClr val="accent1"/>
+          </a:fillRef>
+          <a:effectRef idx="2">
+            <a:schemeClr val="accent1"/>
+          </a:effectRef>
+          <a:fontRef idx="minor">
+            <a:schemeClr val="lt1"/>
+          </a:fontRef>
+        </p:style>
+        <p:txBody>
+          <a:bodyPr rtlCol="0" anchor="ctr" lIns="137160"/>
+          <a:lstStyle/>
+          <a:p>
+            <a:pPr algn="l">
+              <a:defRPr sz="1400" b="1">
+                <a:solidFill>
+                  <a:srgbClr val="C7D2FE"/>
+                </a:solidFill>
+                <a:latin typeface="Consolas"/>
+              </a:defRPr>
+            </a:pPr>
+            <a:r>
+              <a:t>MODULE 6</a:t>
+            </a:r>
+          </a:p>
+        </p:txBody>
+      </p:sp>
+      <p:sp>
+        <p:nvSpPr>
+          <p:cNvPr id="9" name="TextBox 8"/>
           <p:cNvSpPr txBox="1"/>
           <p:nvPr/>
         </p:nvSpPr>
         <p:spPr>
           <a:xfrm>
-            <a:off x="914400" y="1097280"/>
-            <a:ext cx="10058400" cy="731520"/>
-          </a:xfrm>
-          <a:prstGeom prst="rect">
-            <a:avLst/>
-          </a:prstGeom>
-          <a:noFill/>
-        </p:spPr>
-        <p:txBody>
-          <a:bodyPr wrap="none">
-            <a:spAutoFit/>
-          </a:bodyPr>
-          <a:lstStyle/>
-          <a:p>
-            <a:pPr>
-              <a:defRPr sz="2000" b="1">
-                <a:solidFill>
-                  <a:srgbClr val="007BFF"/>
-                </a:solidFill>
-                <a:latin typeface="Calibri"/>
-              </a:defRPr>
-            </a:pPr>
-            <a:r>
-              <a:t>MODULE 6</a:t>
-            </a:r>
-          </a:p>
-        </p:txBody>
-      </p:sp>
-      <p:sp>
-        <p:nvSpPr>
-          <p:cNvPr id="4" name="TextBox 3"/>
-          <p:cNvSpPr txBox="1"/>
-          <p:nvPr/>
-        </p:nvSpPr>
-        <p:spPr>
-          <a:xfrm>
-            <a:off x="914400" y="2011680"/>
-            <a:ext cx="10058400" cy="1828800"/>
+            <a:off x="914400" y="2286000"/>
+            <a:ext cx="9144000" cy="2011680"/>
           </a:xfrm>
           <a:prstGeom prst="rect">
             <a:avLst/>
@@ -3209,30 +3446,34 @@
           </a:bodyPr>
           <a:lstStyle/>
           <a:p>
-            <a:pPr>
-              <a:defRPr sz="4400" b="1">
+            <a:pPr algn="l">
+              <a:defRPr sz="4000" b="1">
                 <a:solidFill>
                   <a:srgbClr val="FFFFFF"/>
                 </a:solidFill>
-                <a:latin typeface="Calibri"/>
-              </a:defRPr>
-            </a:pPr>
-            <a:r>
-              <a:t>Analysis and Interpretation</a:t>
-            </a:r>
-          </a:p>
-        </p:txBody>
-      </p:sp>
-      <p:sp>
-        <p:nvSpPr>
-          <p:cNvPr id="5" name="TextBox 4"/>
+                <a:latin typeface="Inter"/>
+              </a:defRPr>
+            </a:pPr>
+            <a:r>
+              <a:t>Analysis and</a:t>
+            </a:r>
+            <a:br/>
+            <a:r>
+              <a:t>Interpretation</a:t>
+            </a:r>
+          </a:p>
+        </p:txBody>
+      </p:sp>
+      <p:sp>
+        <p:nvSpPr>
+          <p:cNvPr id="10" name="TextBox 9"/>
           <p:cNvSpPr txBox="1"/>
           <p:nvPr/>
         </p:nvSpPr>
         <p:spPr>
           <a:xfrm>
-            <a:off x="914400" y="4114800"/>
-            <a:ext cx="9144000" cy="1371600"/>
+            <a:off x="914400" y="4389120"/>
+            <a:ext cx="8686800" cy="1371600"/>
           </a:xfrm>
           <a:prstGeom prst="rect">
             <a:avLst/>
@@ -3245,12 +3486,12 @@
           </a:bodyPr>
           <a:lstStyle/>
           <a:p>
-            <a:pPr>
-              <a:defRPr sz="2200">
-                <a:solidFill>
-                  <a:srgbClr val="CCCCCC"/>
-                </a:solidFill>
-                <a:latin typeface="Calibri"/>
+            <a:pPr algn="l">
+              <a:defRPr sz="1900" b="0">
+                <a:solidFill>
+                  <a:srgbClr val="A5B4FC"/>
+                </a:solidFill>
+                <a:latin typeface="Inter"/>
               </a:defRPr>
             </a:pPr>
             <a:r>
@@ -3261,14 +3502,14 @@
       </p:sp>
       <p:sp>
         <p:nvSpPr>
-          <p:cNvPr id="6" name="TextBox 5"/>
+          <p:cNvPr id="11" name="TextBox 10"/>
           <p:cNvSpPr txBox="1"/>
           <p:nvPr/>
         </p:nvSpPr>
         <p:spPr>
           <a:xfrm>
-            <a:off x="914400" y="6126480"/>
-            <a:ext cx="10058400" cy="457200"/>
+            <a:off x="731520" y="6400800"/>
+            <a:ext cx="10058400" cy="365760"/>
           </a:xfrm>
           <a:prstGeom prst="rect">
             <a:avLst/>
@@ -3281,16 +3522,16 @@
           </a:bodyPr>
           <a:lstStyle/>
           <a:p>
-            <a:pPr>
-              <a:defRPr sz="1200">
-                <a:solidFill>
-                  <a:srgbClr val="888888"/>
-                </a:solidFill>
-                <a:latin typeface="Calibri"/>
-              </a:defRPr>
-            </a:pPr>
-            <a:r>
-              <a:t>Copyright © 2026 Martin J. Gallagher. Licensed under GPL-3.0-or-later.</a:t>
+            <a:pPr algn="l">
+              <a:defRPr sz="1000" b="0">
+                <a:solidFill>
+                  <a:srgbClr val="6366F1"/>
+                </a:solidFill>
+                <a:latin typeface="Consolas"/>
+              </a:defRPr>
+            </a:pPr>
+            <a:r>
+              <a:t>© 2026 Martin J. Gallagher  |  GPL-3.0-or-later  |  doehelper.com</a:t>
             </a:r>
           </a:p>
         </p:txBody>
@@ -3309,7 +3550,7 @@
     <p:bg>
       <p:bgPr>
         <a:solidFill>
-          <a:srgbClr val="FFFFFF"/>
+          <a:srgbClr val="FAFAFA"/>
         </a:solidFill>
         <a:effectLst/>
       </p:bgPr>
@@ -3330,13 +3571,13 @@
         <p:spPr>
           <a:xfrm>
             <a:off x="0" y="0"/>
-            <a:ext cx="12191695" cy="54864"/>
+            <a:ext cx="12191695" cy="45720"/>
           </a:xfrm>
           <a:prstGeom prst="rect">
             <a:avLst/>
           </a:prstGeom>
           <a:solidFill>
-            <a:srgbClr val="00C853"/>
+            <a:srgbClr val="0D9488"/>
           </a:solidFill>
           <a:ln>
             <a:noFill/>
@@ -3372,8 +3613,8 @@
         </p:nvSpPr>
         <p:spPr>
           <a:xfrm>
-            <a:off x="731520" y="365760"/>
-            <a:ext cx="10515600" cy="822960"/>
+            <a:off x="777240" y="320040"/>
+            <a:ext cx="10058400" cy="548640"/>
           </a:xfrm>
           <a:prstGeom prst="rect">
             <a:avLst/>
@@ -3386,36 +3627,36 @@
           </a:bodyPr>
           <a:lstStyle/>
           <a:p>
-            <a:pPr>
-              <a:defRPr sz="3000" b="1">
-                <a:solidFill>
-                  <a:srgbClr val="222222"/>
-                </a:solidFill>
-                <a:latin typeface="Calibri"/>
-              </a:defRPr>
-            </a:pPr>
-            <a:r>
-              <a:t>doe analyze in Practice</a:t>
-            </a:r>
-          </a:p>
-        </p:txBody>
-      </p:sp>
-      <p:sp>
-        <p:nvSpPr>
-          <p:cNvPr id="4" name="Rounded Rectangle 3"/>
+            <a:pPr algn="l">
+              <a:defRPr sz="2600" b="1">
+                <a:solidFill>
+                  <a:srgbClr val="111111"/>
+                </a:solidFill>
+                <a:latin typeface="Inter"/>
+              </a:defRPr>
+            </a:pPr>
+            <a:r>
+              <a:t>Generating HTML Reports</a:t>
+            </a:r>
+          </a:p>
+        </p:txBody>
+      </p:sp>
+      <p:sp>
+        <p:nvSpPr>
+          <p:cNvPr id="4" name="Rectangle 3"/>
           <p:cNvSpPr/>
           <p:nvPr/>
         </p:nvSpPr>
         <p:spPr>
           <a:xfrm>
-            <a:off x="731520" y="1371600"/>
-            <a:ext cx="10515600" cy="4114800"/>
-          </a:xfrm>
-          <a:prstGeom prst="roundRect">
+            <a:off x="548640" y="1051560"/>
+            <a:ext cx="10972800" cy="320040"/>
+          </a:xfrm>
+          <a:prstGeom prst="rect">
             <a:avLst/>
           </a:prstGeom>
           <a:solidFill>
-            <a:srgbClr val="2D2D2D"/>
+            <a:srgbClr val="222222"/>
           </a:solidFill>
           <a:ln>
             <a:noFill/>
@@ -3436,192 +3677,310 @@
           </a:fontRef>
         </p:style>
         <p:txBody>
-          <a:bodyPr rtlCol="0" anchor="ctr" wrap="square" lIns="274320" tIns="274320"/>
+          <a:bodyPr rtlCol="0" anchor="ctr"/>
+          <a:lstStyle/>
+          <a:p>
+            <a:pPr algn="ctr"/>
+          </a:p>
+        </p:txBody>
+      </p:sp>
+      <p:sp>
+        <p:nvSpPr>
+          <p:cNvPr id="5" name="TextBox 4"/>
+          <p:cNvSpPr txBox="1"/>
+          <p:nvPr/>
+        </p:nvSpPr>
+        <p:spPr>
+          <a:xfrm>
+            <a:off x="822960" y="1051560"/>
+            <a:ext cx="3657600" cy="320040"/>
+          </a:xfrm>
+          <a:prstGeom prst="rect">
+            <a:avLst/>
+          </a:prstGeom>
+          <a:noFill/>
+        </p:spPr>
+        <p:txBody>
+          <a:bodyPr wrap="square" anchor="ctr">
+            <a:spAutoFit/>
+          </a:bodyPr>
+          <a:lstStyle/>
+          <a:p>
+            <a:pPr algn="l">
+              <a:defRPr sz="1000" b="0">
+                <a:solidFill>
+                  <a:srgbClr val="999999"/>
+                </a:solidFill>
+                <a:latin typeface="Consolas"/>
+              </a:defRPr>
+            </a:pPr>
+            <a:r>
+              <a:t>terminal</a:t>
+            </a:r>
+          </a:p>
+        </p:txBody>
+      </p:sp>
+      <p:sp>
+        <p:nvSpPr>
+          <p:cNvPr id="6" name="Rounded Rectangle 5"/>
+          <p:cNvSpPr/>
+          <p:nvPr/>
+        </p:nvSpPr>
+        <p:spPr>
+          <a:xfrm>
+            <a:off x="548640" y="1371600"/>
+            <a:ext cx="10972800" cy="4389120"/>
+          </a:xfrm>
+          <a:prstGeom prst="roundRect">
+            <a:avLst/>
+          </a:prstGeom>
+          <a:solidFill>
+            <a:srgbClr val="1A1A1A"/>
+          </a:solidFill>
+          <a:ln>
+            <a:noFill/>
+          </a:ln>
+        </p:spPr>
+        <p:style>
+          <a:lnRef idx="1">
+            <a:schemeClr val="accent1"/>
+          </a:lnRef>
+          <a:fillRef idx="3">
+            <a:schemeClr val="accent1"/>
+          </a:fillRef>
+          <a:effectRef idx="2">
+            <a:schemeClr val="accent1"/>
+          </a:effectRef>
+          <a:fontRef idx="minor">
+            <a:schemeClr val="lt1"/>
+          </a:fontRef>
+        </p:style>
+        <p:txBody>
+          <a:bodyPr rtlCol="0" anchor="ctr" wrap="square" lIns="274320" tIns="182880" rIns="274320"/>
           <a:lstStyle/>
           <a:p>
             <a:pPr algn="ctr">
               <a:spcAft>
-                <a:spcPts val="200"/>
+                <a:spcPts val="100"/>
               </a:spcAft>
-              <a:defRPr sz="1800">
-                <a:solidFill>
-                  <a:srgbClr val="D4D4D4"/>
+              <a:defRPr sz="1500">
+                <a:solidFill>
+                  <a:srgbClr val="6EC86E"/>
                 </a:solidFill>
                 <a:latin typeface="Consolas"/>
               </a:defRPr>
             </a:pPr>
             <a:r>
-              <a:t>$ doe analyze reactor_rsm/</a:t>
+              <a:t>$ doe report reactor_rsm/</a:t>
             </a:r>
           </a:p>
           <a:p>
             <a:pPr>
               <a:spcAft>
-                <a:spcPts val="200"/>
+                <a:spcPts val="100"/>
               </a:spcAft>
-              <a:defRPr sz="1800">
-                <a:solidFill>
-                  <a:srgbClr val="D4D4D4"/>
+              <a:defRPr sz="1500">
+                <a:solidFill>
+                  <a:srgbClr val="CCCCCC"/>
                 </a:solidFill>
                 <a:latin typeface="Consolas"/>
               </a:defRPr>
             </a:pPr>
+            <a:r>
+              <a:t>  Report generated: reactor_rsm/report.html</a:t>
+            </a:r>
           </a:p>
           <a:p>
             <a:pPr>
               <a:spcAft>
-                <a:spcPts val="200"/>
+                <a:spcPts val="100"/>
               </a:spcAft>
-              <a:defRPr sz="1800">
-                <a:solidFill>
-                  <a:srgbClr val="D4D4D4"/>
+              <a:defRPr sz="1500">
+                <a:solidFill>
+                  <a:srgbClr val="CCCCCC"/>
                 </a:solidFill>
                 <a:latin typeface="Consolas"/>
               </a:defRPr>
             </a:pPr>
-            <a:r>
-              <a:t>ANOVA Table</a:t>
-            </a:r>
           </a:p>
           <a:p>
             <a:pPr>
               <a:spcAft>
-                <a:spcPts val="200"/>
+                <a:spcPts val="100"/>
               </a:spcAft>
-              <a:defRPr sz="1800">
-                <a:solidFill>
-                  <a:srgbClr val="D4D4D4"/>
+              <a:defRPr sz="1500">
+                <a:solidFill>
+                  <a:srgbClr val="555555"/>
                 </a:solidFill>
                 <a:latin typeface="Consolas"/>
               </a:defRPr>
             </a:pPr>
             <a:r>
-              <a:t>  Source        SS       DF    MS       F       p-value   Sig</a:t>
+              <a:t># The report includes:</a:t>
             </a:r>
           </a:p>
           <a:p>
             <a:pPr>
               <a:spcAft>
-                <a:spcPts val="200"/>
+                <a:spcPts val="100"/>
               </a:spcAft>
-              <a:defRPr sz="1800">
-                <a:solidFill>
-                  <a:srgbClr val="D4D4D4"/>
+              <a:defRPr sz="1500">
+                <a:solidFill>
+                  <a:srgbClr val="555555"/>
                 </a:solidFill>
                 <a:latin typeface="Consolas"/>
               </a:defRPr>
             </a:pPr>
             <a:r>
-              <a:t>  temperature   1240.5   1    1240.5   45.2    0.0001    ***</a:t>
+              <a:t>#   - Executive summary with key findings</a:t>
             </a:r>
           </a:p>
           <a:p>
             <a:pPr>
               <a:spcAft>
-                <a:spcPts val="200"/>
+                <a:spcPts val="100"/>
               </a:spcAft>
-              <a:defRPr sz="1800">
-                <a:solidFill>
-                  <a:srgbClr val="D4D4D4"/>
+              <a:defRPr sz="1500">
+                <a:solidFill>
+                  <a:srgbClr val="555555"/>
                 </a:solidFill>
                 <a:latin typeface="Consolas"/>
               </a:defRPr>
             </a:pPr>
             <a:r>
-              <a:t>  pressure       890.3   1     890.3   32.4    0.0005    ***</a:t>
+              <a:t>#   - Interactive plots (zoom, hover, pan)</a:t>
             </a:r>
           </a:p>
           <a:p>
             <a:pPr>
               <a:spcAft>
-                <a:spcPts val="200"/>
+                <a:spcPts val="100"/>
               </a:spcAft>
-              <a:defRPr sz="1800">
-                <a:solidFill>
-                  <a:srgbClr val="D4D4D4"/>
+              <a:defRPr sz="1500">
+                <a:solidFill>
+                  <a:srgbClr val="555555"/>
                 </a:solidFill>
                 <a:latin typeface="Consolas"/>
               </a:defRPr>
             </a:pPr>
             <a:r>
-              <a:t>  catalyst       45.2    1      45.2    1.6    0.2345</a:t>
+              <a:t>#   - Full ANOVA table</a:t>
             </a:r>
           </a:p>
           <a:p>
             <a:pPr>
               <a:spcAft>
-                <a:spcPts val="200"/>
+                <a:spcPts val="100"/>
               </a:spcAft>
-              <a:defRPr sz="1800">
-                <a:solidFill>
-                  <a:srgbClr val="D4D4D4"/>
+              <a:defRPr sz="1500">
+                <a:solidFill>
+                  <a:srgbClr val="555555"/>
                 </a:solidFill>
                 <a:latin typeface="Consolas"/>
               </a:defRPr>
             </a:pPr>
             <a:r>
-              <a:t>  temp*press     320.1   1     320.1   11.7    0.0089    **</a:t>
+              <a:t>#   - Effect estimates and confidence intervals</a:t>
             </a:r>
           </a:p>
           <a:p>
             <a:pPr>
               <a:spcAft>
-                <a:spcPts val="200"/>
+                <a:spcPts val="100"/>
               </a:spcAft>
-              <a:defRPr sz="1800">
-                <a:solidFill>
-                  <a:srgbClr val="D4D4D4"/>
+              <a:defRPr sz="1500">
+                <a:solidFill>
+                  <a:srgbClr val="555555"/>
                 </a:solidFill>
                 <a:latin typeface="Consolas"/>
               </a:defRPr>
             </a:pPr>
             <a:r>
-              <a:t>  temp^2         156.7   1     156.7    5.7    0.0412    *</a:t>
+              <a:t>#   - Residual diagnostics</a:t>
             </a:r>
           </a:p>
           <a:p>
             <a:pPr>
               <a:spcAft>
-                <a:spcPts val="200"/>
+                <a:spcPts val="100"/>
               </a:spcAft>
-              <a:defRPr sz="1800">
-                <a:solidFill>
-                  <a:srgbClr val="D4D4D4"/>
+              <a:defRPr sz="1500">
+                <a:solidFill>
+                  <a:srgbClr val="555555"/>
                 </a:solidFill>
                 <a:latin typeface="Consolas"/>
               </a:defRPr>
             </a:pPr>
             <a:r>
-              <a:t>  ...</a:t>
+              <a:t>#   - Response surface plots (for RSM designs)</a:t>
             </a:r>
           </a:p>
           <a:p>
             <a:pPr>
               <a:spcAft>
-                <a:spcPts val="200"/>
+                <a:spcPts val="100"/>
               </a:spcAft>
-              <a:defRPr sz="1800">
-                <a:solidFill>
-                  <a:srgbClr val="D4D4D4"/>
+              <a:defRPr sz="1500">
+                <a:solidFill>
+                  <a:srgbClr val="555555"/>
                 </a:solidFill>
                 <a:latin typeface="Consolas"/>
               </a:defRPr>
             </a:pPr>
+            <a:r>
+              <a:t>#   - Optimal settings (if doe optimize was run)</a:t>
+            </a:r>
           </a:p>
           <a:p>
             <a:pPr>
               <a:spcAft>
-                <a:spcPts val="200"/>
+                <a:spcPts val="100"/>
               </a:spcAft>
-              <a:defRPr sz="1800">
-                <a:solidFill>
-                  <a:srgbClr val="D4D4D4"/>
+              <a:defRPr sz="1500">
+                <a:solidFill>
+                  <a:srgbClr val="555555"/>
                 </a:solidFill>
                 <a:latin typeface="Consolas"/>
               </a:defRPr>
             </a:pPr>
             <a:r>
-              <a:t>Model: R^2 = 0.967   Adj R^2 = 0.945   Pred R^2 = 0.912</a:t>
+              <a:t>#   - Self-contained single HTML file (easy to share)</a:t>
+            </a:r>
+          </a:p>
+        </p:txBody>
+      </p:sp>
+      <p:sp>
+        <p:nvSpPr>
+          <p:cNvPr id="7" name="TextBox 6"/>
+          <p:cNvSpPr txBox="1"/>
+          <p:nvPr/>
+        </p:nvSpPr>
+        <p:spPr>
+          <a:xfrm>
+            <a:off x="731520" y="6400800"/>
+            <a:ext cx="10058400" cy="365760"/>
+          </a:xfrm>
+          <a:prstGeom prst="rect">
+            <a:avLst/>
+          </a:prstGeom>
+          <a:noFill/>
+        </p:spPr>
+        <p:txBody>
+          <a:bodyPr wrap="square">
+            <a:spAutoFit/>
+          </a:bodyPr>
+          <a:lstStyle/>
+          <a:p>
+            <a:pPr algn="l">
+              <a:defRPr sz="1000" b="0">
+                <a:solidFill>
+                  <a:srgbClr val="999999"/>
+                </a:solidFill>
+                <a:latin typeface="Consolas"/>
+              </a:defRPr>
+            </a:pPr>
+            <a:r>
+              <a:t>© 2026 Martin J. Gallagher  |  GPL-3.0-or-later  |  doehelper.com</a:t>
             </a:r>
           </a:p>
         </p:txBody>
@@ -3640,7 +3999,7 @@
     <p:bg>
       <p:bgPr>
         <a:solidFill>
-          <a:srgbClr val="FFFFFF"/>
+          <a:srgbClr val="1E1B4B"/>
         </a:solidFill>
         <a:effectLst/>
       </p:bgPr>
@@ -3660,14 +4019,14 @@
         </p:nvSpPr>
         <p:spPr>
           <a:xfrm>
-            <a:off x="0" y="0"/>
-            <a:ext cx="12191695" cy="54864"/>
+            <a:off x="3657600" y="0"/>
+            <a:ext cx="4572000" cy="6858000"/>
           </a:xfrm>
           <a:prstGeom prst="rect">
             <a:avLst/>
           </a:prstGeom>
           <a:solidFill>
-            <a:srgbClr val="00C853"/>
+            <a:srgbClr val="312E81"/>
           </a:solidFill>
           <a:ln>
             <a:noFill/>
@@ -3697,56 +4056,20 @@
       </p:sp>
       <p:sp>
         <p:nvSpPr>
-          <p:cNvPr id="3" name="TextBox 2"/>
-          <p:cNvSpPr txBox="1"/>
-          <p:nvPr/>
-        </p:nvSpPr>
-        <p:spPr>
-          <a:xfrm>
-            <a:off x="731520" y="365760"/>
-            <a:ext cx="10515600" cy="822960"/>
+          <p:cNvPr id="3" name="Rectangle 2"/>
+          <p:cNvSpPr/>
+          <p:nvPr/>
+        </p:nvSpPr>
+        <p:spPr>
+          <a:xfrm>
+            <a:off x="8229600" y="0"/>
+            <a:ext cx="3962095" cy="6858000"/>
           </a:xfrm>
           <a:prstGeom prst="rect">
             <a:avLst/>
           </a:prstGeom>
-          <a:noFill/>
-        </p:spPr>
-        <p:txBody>
-          <a:bodyPr wrap="square">
-            <a:spAutoFit/>
-          </a:bodyPr>
-          <a:lstStyle/>
-          <a:p>
-            <a:pPr>
-              <a:defRPr sz="3000" b="1">
-                <a:solidFill>
-                  <a:srgbClr val="222222"/>
-                </a:solidFill>
-                <a:latin typeface="Calibri"/>
-              </a:defRPr>
-            </a:pPr>
-            <a:r>
-              <a:t>Generating HTML Reports</a:t>
-            </a:r>
-          </a:p>
-        </p:txBody>
-      </p:sp>
-      <p:sp>
-        <p:nvSpPr>
-          <p:cNvPr id="4" name="Rounded Rectangle 3"/>
-          <p:cNvSpPr/>
-          <p:nvPr/>
-        </p:nvSpPr>
-        <p:spPr>
-          <a:xfrm>
-            <a:off x="731520" y="1371600"/>
-            <a:ext cx="10515600" cy="4114800"/>
-          </a:xfrm>
-          <a:prstGeom prst="roundRect">
-            <a:avLst/>
-          </a:prstGeom>
           <a:solidFill>
-            <a:srgbClr val="2D2D2D"/>
+            <a:srgbClr val="4338CA"/>
           </a:solidFill>
           <a:ln>
             <a:noFill/>
@@ -3767,208 +4090,691 @@
           </a:fontRef>
         </p:style>
         <p:txBody>
-          <a:bodyPr rtlCol="0" anchor="ctr" wrap="square" lIns="274320" tIns="274320"/>
-          <a:lstStyle/>
-          <a:p>
-            <a:pPr algn="ctr">
-              <a:spcAft>
-                <a:spcPts val="200"/>
-              </a:spcAft>
-              <a:defRPr sz="1800">
-                <a:solidFill>
-                  <a:srgbClr val="D4D4D4"/>
+          <a:bodyPr rtlCol="0" anchor="ctr"/>
+          <a:lstStyle/>
+          <a:p>
+            <a:pPr algn="ctr"/>
+          </a:p>
+        </p:txBody>
+      </p:sp>
+      <p:sp>
+        <p:nvSpPr>
+          <p:cNvPr id="4" name="TextBox 3"/>
+          <p:cNvSpPr txBox="1"/>
+          <p:nvPr/>
+        </p:nvSpPr>
+        <p:spPr>
+          <a:xfrm>
+            <a:off x="731520" y="365760"/>
+            <a:ext cx="10058400" cy="640080"/>
+          </a:xfrm>
+          <a:prstGeom prst="rect">
+            <a:avLst/>
+          </a:prstGeom>
+          <a:noFill/>
+        </p:spPr>
+        <p:txBody>
+          <a:bodyPr wrap="square">
+            <a:spAutoFit/>
+          </a:bodyPr>
+          <a:lstStyle/>
+          <a:p>
+            <a:pPr algn="l">
+              <a:defRPr sz="3000" b="1">
+                <a:solidFill>
+                  <a:srgbClr val="FFFFFF"/>
+                </a:solidFill>
+                <a:latin typeface="Inter"/>
+              </a:defRPr>
+            </a:pPr>
+            <a:r>
+              <a:t>Key Takeaways</a:t>
+            </a:r>
+          </a:p>
+        </p:txBody>
+      </p:sp>
+      <p:sp>
+        <p:nvSpPr>
+          <p:cNvPr id="5" name="Rounded Rectangle 4"/>
+          <p:cNvSpPr/>
+          <p:nvPr/>
+        </p:nvSpPr>
+        <p:spPr>
+          <a:xfrm>
+            <a:off x="731520" y="1280160"/>
+            <a:ext cx="10515600" cy="777240"/>
+          </a:xfrm>
+          <a:prstGeom prst="roundRect">
+            <a:avLst/>
+          </a:prstGeom>
+          <a:solidFill>
+            <a:srgbClr val="312E81"/>
+          </a:solidFill>
+          <a:ln>
+            <a:noFill/>
+          </a:ln>
+        </p:spPr>
+        <p:style>
+          <a:lnRef idx="1">
+            <a:schemeClr val="accent1"/>
+          </a:lnRef>
+          <a:fillRef idx="3">
+            <a:schemeClr val="accent1"/>
+          </a:fillRef>
+          <a:effectRef idx="2">
+            <a:schemeClr val="accent1"/>
+          </a:effectRef>
+          <a:fontRef idx="minor">
+            <a:schemeClr val="lt1"/>
+          </a:fontRef>
+        </p:style>
+        <p:txBody>
+          <a:bodyPr rtlCol="0" anchor="ctr"/>
+          <a:lstStyle/>
+          <a:p>
+            <a:pPr algn="ctr"/>
+          </a:p>
+        </p:txBody>
+      </p:sp>
+      <p:sp>
+        <p:nvSpPr>
+          <p:cNvPr id="6" name="Oval 5"/>
+          <p:cNvSpPr/>
+          <p:nvPr/>
+        </p:nvSpPr>
+        <p:spPr>
+          <a:xfrm>
+            <a:off x="1005840" y="1508760"/>
+            <a:ext cx="320040" cy="320040"/>
+          </a:xfrm>
+          <a:prstGeom prst="ellipse">
+            <a:avLst/>
+          </a:prstGeom>
+          <a:solidFill>
+            <a:srgbClr val="5046E5"/>
+          </a:solidFill>
+          <a:ln>
+            <a:noFill/>
+          </a:ln>
+        </p:spPr>
+        <p:style>
+          <a:lnRef idx="1">
+            <a:schemeClr val="accent1"/>
+          </a:lnRef>
+          <a:fillRef idx="3">
+            <a:schemeClr val="accent1"/>
+          </a:fillRef>
+          <a:effectRef idx="2">
+            <a:schemeClr val="accent1"/>
+          </a:effectRef>
+          <a:fontRef idx="minor">
+            <a:schemeClr val="lt1"/>
+          </a:fontRef>
+        </p:style>
+        <p:txBody>
+          <a:bodyPr rtlCol="0" anchor="ctr"/>
+          <a:lstStyle/>
+          <a:p>
+            <a:pPr algn="ctr"/>
+          </a:p>
+        </p:txBody>
+      </p:sp>
+      <p:sp>
+        <p:nvSpPr>
+          <p:cNvPr id="7" name="TextBox 6"/>
+          <p:cNvSpPr txBox="1"/>
+          <p:nvPr/>
+        </p:nvSpPr>
+        <p:spPr>
+          <a:xfrm>
+            <a:off x="1554480" y="1325880"/>
+            <a:ext cx="9418320" cy="777240"/>
+          </a:xfrm>
+          <a:prstGeom prst="rect">
+            <a:avLst/>
+          </a:prstGeom>
+          <a:noFill/>
+        </p:spPr>
+        <p:txBody>
+          <a:bodyPr wrap="square" anchor="ctr">
+            <a:spAutoFit/>
+          </a:bodyPr>
+          <a:lstStyle/>
+          <a:p>
+            <a:pPr algn="l">
+              <a:defRPr sz="1800" b="0">
+                <a:solidFill>
+                  <a:srgbClr val="FFFFFF"/>
+                </a:solidFill>
+                <a:latin typeface="Inter"/>
+              </a:defRPr>
+            </a:pPr>
+            <a:r>
+              <a:t>doe analyze automates the entire analysis pipeline</a:t>
+            </a:r>
+          </a:p>
+        </p:txBody>
+      </p:sp>
+      <p:sp>
+        <p:nvSpPr>
+          <p:cNvPr id="8" name="Rounded Rectangle 7"/>
+          <p:cNvSpPr/>
+          <p:nvPr/>
+        </p:nvSpPr>
+        <p:spPr>
+          <a:xfrm>
+            <a:off x="731520" y="2167128"/>
+            <a:ext cx="10515600" cy="777240"/>
+          </a:xfrm>
+          <a:prstGeom prst="roundRect">
+            <a:avLst/>
+          </a:prstGeom>
+          <a:solidFill>
+            <a:srgbClr val="312E81"/>
+          </a:solidFill>
+          <a:ln>
+            <a:noFill/>
+          </a:ln>
+        </p:spPr>
+        <p:style>
+          <a:lnRef idx="1">
+            <a:schemeClr val="accent1"/>
+          </a:lnRef>
+          <a:fillRef idx="3">
+            <a:schemeClr val="accent1"/>
+          </a:fillRef>
+          <a:effectRef idx="2">
+            <a:schemeClr val="accent1"/>
+          </a:effectRef>
+          <a:fontRef idx="minor">
+            <a:schemeClr val="lt1"/>
+          </a:fontRef>
+        </p:style>
+        <p:txBody>
+          <a:bodyPr rtlCol="0" anchor="ctr"/>
+          <a:lstStyle/>
+          <a:p>
+            <a:pPr algn="ctr"/>
+          </a:p>
+        </p:txBody>
+      </p:sp>
+      <p:sp>
+        <p:nvSpPr>
+          <p:cNvPr id="9" name="Oval 8"/>
+          <p:cNvSpPr/>
+          <p:nvPr/>
+        </p:nvSpPr>
+        <p:spPr>
+          <a:xfrm>
+            <a:off x="1005840" y="2395728"/>
+            <a:ext cx="320040" cy="320040"/>
+          </a:xfrm>
+          <a:prstGeom prst="ellipse">
+            <a:avLst/>
+          </a:prstGeom>
+          <a:solidFill>
+            <a:srgbClr val="5046E5"/>
+          </a:solidFill>
+          <a:ln>
+            <a:noFill/>
+          </a:ln>
+        </p:spPr>
+        <p:style>
+          <a:lnRef idx="1">
+            <a:schemeClr val="accent1"/>
+          </a:lnRef>
+          <a:fillRef idx="3">
+            <a:schemeClr val="accent1"/>
+          </a:fillRef>
+          <a:effectRef idx="2">
+            <a:schemeClr val="accent1"/>
+          </a:effectRef>
+          <a:fontRef idx="minor">
+            <a:schemeClr val="lt1"/>
+          </a:fontRef>
+        </p:style>
+        <p:txBody>
+          <a:bodyPr rtlCol="0" anchor="ctr"/>
+          <a:lstStyle/>
+          <a:p>
+            <a:pPr algn="ctr"/>
+          </a:p>
+        </p:txBody>
+      </p:sp>
+      <p:sp>
+        <p:nvSpPr>
+          <p:cNvPr id="10" name="TextBox 9"/>
+          <p:cNvSpPr txBox="1"/>
+          <p:nvPr/>
+        </p:nvSpPr>
+        <p:spPr>
+          <a:xfrm>
+            <a:off x="1554480" y="2212848"/>
+            <a:ext cx="9418320" cy="777240"/>
+          </a:xfrm>
+          <a:prstGeom prst="rect">
+            <a:avLst/>
+          </a:prstGeom>
+          <a:noFill/>
+        </p:spPr>
+        <p:txBody>
+          <a:bodyPr wrap="square" anchor="ctr">
+            <a:spAutoFit/>
+          </a:bodyPr>
+          <a:lstStyle/>
+          <a:p>
+            <a:pPr algn="l">
+              <a:defRPr sz="1800" b="0">
+                <a:solidFill>
+                  <a:srgbClr val="FFFFFF"/>
+                </a:solidFill>
+                <a:latin typeface="Inter"/>
+              </a:defRPr>
+            </a:pPr>
+            <a:r>
+              <a:t>Pareto chart: quick visual ID of significant factors</a:t>
+            </a:r>
+          </a:p>
+        </p:txBody>
+      </p:sp>
+      <p:sp>
+        <p:nvSpPr>
+          <p:cNvPr id="11" name="Rounded Rectangle 10"/>
+          <p:cNvSpPr/>
+          <p:nvPr/>
+        </p:nvSpPr>
+        <p:spPr>
+          <a:xfrm>
+            <a:off x="731520" y="3054096"/>
+            <a:ext cx="10515600" cy="777240"/>
+          </a:xfrm>
+          <a:prstGeom prst="roundRect">
+            <a:avLst/>
+          </a:prstGeom>
+          <a:solidFill>
+            <a:srgbClr val="312E81"/>
+          </a:solidFill>
+          <a:ln>
+            <a:noFill/>
+          </a:ln>
+        </p:spPr>
+        <p:style>
+          <a:lnRef idx="1">
+            <a:schemeClr val="accent1"/>
+          </a:lnRef>
+          <a:fillRef idx="3">
+            <a:schemeClr val="accent1"/>
+          </a:fillRef>
+          <a:effectRef idx="2">
+            <a:schemeClr val="accent1"/>
+          </a:effectRef>
+          <a:fontRef idx="minor">
+            <a:schemeClr val="lt1"/>
+          </a:fontRef>
+        </p:style>
+        <p:txBody>
+          <a:bodyPr rtlCol="0" anchor="ctr"/>
+          <a:lstStyle/>
+          <a:p>
+            <a:pPr algn="ctr"/>
+          </a:p>
+        </p:txBody>
+      </p:sp>
+      <p:sp>
+        <p:nvSpPr>
+          <p:cNvPr id="12" name="Oval 11"/>
+          <p:cNvSpPr/>
+          <p:nvPr/>
+        </p:nvSpPr>
+        <p:spPr>
+          <a:xfrm>
+            <a:off x="1005840" y="3282696"/>
+            <a:ext cx="320040" cy="320040"/>
+          </a:xfrm>
+          <a:prstGeom prst="ellipse">
+            <a:avLst/>
+          </a:prstGeom>
+          <a:solidFill>
+            <a:srgbClr val="5046E5"/>
+          </a:solidFill>
+          <a:ln>
+            <a:noFill/>
+          </a:ln>
+        </p:spPr>
+        <p:style>
+          <a:lnRef idx="1">
+            <a:schemeClr val="accent1"/>
+          </a:lnRef>
+          <a:fillRef idx="3">
+            <a:schemeClr val="accent1"/>
+          </a:fillRef>
+          <a:effectRef idx="2">
+            <a:schemeClr val="accent1"/>
+          </a:effectRef>
+          <a:fontRef idx="minor">
+            <a:schemeClr val="lt1"/>
+          </a:fontRef>
+        </p:style>
+        <p:txBody>
+          <a:bodyPr rtlCol="0" anchor="ctr"/>
+          <a:lstStyle/>
+          <a:p>
+            <a:pPr algn="ctr"/>
+          </a:p>
+        </p:txBody>
+      </p:sp>
+      <p:sp>
+        <p:nvSpPr>
+          <p:cNvPr id="13" name="TextBox 12"/>
+          <p:cNvSpPr txBox="1"/>
+          <p:nvPr/>
+        </p:nvSpPr>
+        <p:spPr>
+          <a:xfrm>
+            <a:off x="1554480" y="3099816"/>
+            <a:ext cx="9418320" cy="777240"/>
+          </a:xfrm>
+          <a:prstGeom prst="rect">
+            <a:avLst/>
+          </a:prstGeom>
+          <a:noFill/>
+        </p:spPr>
+        <p:txBody>
+          <a:bodyPr wrap="square" anchor="ctr">
+            <a:spAutoFit/>
+          </a:bodyPr>
+          <a:lstStyle/>
+          <a:p>
+            <a:pPr algn="l">
+              <a:defRPr sz="1800" b="0">
+                <a:solidFill>
+                  <a:srgbClr val="FFFFFF"/>
+                </a:solidFill>
+                <a:latin typeface="Inter"/>
+              </a:defRPr>
+            </a:pPr>
+            <a:r>
+              <a:t>Always check residual plots for model adequacy</a:t>
+            </a:r>
+          </a:p>
+        </p:txBody>
+      </p:sp>
+      <p:sp>
+        <p:nvSpPr>
+          <p:cNvPr id="14" name="Rounded Rectangle 13"/>
+          <p:cNvSpPr/>
+          <p:nvPr/>
+        </p:nvSpPr>
+        <p:spPr>
+          <a:xfrm>
+            <a:off x="731520" y="3941064"/>
+            <a:ext cx="10515600" cy="777240"/>
+          </a:xfrm>
+          <a:prstGeom prst="roundRect">
+            <a:avLst/>
+          </a:prstGeom>
+          <a:solidFill>
+            <a:srgbClr val="312E81"/>
+          </a:solidFill>
+          <a:ln>
+            <a:noFill/>
+          </a:ln>
+        </p:spPr>
+        <p:style>
+          <a:lnRef idx="1">
+            <a:schemeClr val="accent1"/>
+          </a:lnRef>
+          <a:fillRef idx="3">
+            <a:schemeClr val="accent1"/>
+          </a:fillRef>
+          <a:effectRef idx="2">
+            <a:schemeClr val="accent1"/>
+          </a:effectRef>
+          <a:fontRef idx="minor">
+            <a:schemeClr val="lt1"/>
+          </a:fontRef>
+        </p:style>
+        <p:txBody>
+          <a:bodyPr rtlCol="0" anchor="ctr"/>
+          <a:lstStyle/>
+          <a:p>
+            <a:pPr algn="ctr"/>
+          </a:p>
+        </p:txBody>
+      </p:sp>
+      <p:sp>
+        <p:nvSpPr>
+          <p:cNvPr id="15" name="Oval 14"/>
+          <p:cNvSpPr/>
+          <p:nvPr/>
+        </p:nvSpPr>
+        <p:spPr>
+          <a:xfrm>
+            <a:off x="1005840" y="4169664"/>
+            <a:ext cx="320040" cy="320040"/>
+          </a:xfrm>
+          <a:prstGeom prst="ellipse">
+            <a:avLst/>
+          </a:prstGeom>
+          <a:solidFill>
+            <a:srgbClr val="5046E5"/>
+          </a:solidFill>
+          <a:ln>
+            <a:noFill/>
+          </a:ln>
+        </p:spPr>
+        <p:style>
+          <a:lnRef idx="1">
+            <a:schemeClr val="accent1"/>
+          </a:lnRef>
+          <a:fillRef idx="3">
+            <a:schemeClr val="accent1"/>
+          </a:fillRef>
+          <a:effectRef idx="2">
+            <a:schemeClr val="accent1"/>
+          </a:effectRef>
+          <a:fontRef idx="minor">
+            <a:schemeClr val="lt1"/>
+          </a:fontRef>
+        </p:style>
+        <p:txBody>
+          <a:bodyPr rtlCol="0" anchor="ctr"/>
+          <a:lstStyle/>
+          <a:p>
+            <a:pPr algn="ctr"/>
+          </a:p>
+        </p:txBody>
+      </p:sp>
+      <p:sp>
+        <p:nvSpPr>
+          <p:cNvPr id="16" name="TextBox 15"/>
+          <p:cNvSpPr txBox="1"/>
+          <p:nvPr/>
+        </p:nvSpPr>
+        <p:spPr>
+          <a:xfrm>
+            <a:off x="1554480" y="3986784"/>
+            <a:ext cx="9418320" cy="777240"/>
+          </a:xfrm>
+          <a:prstGeom prst="rect">
+            <a:avLst/>
+          </a:prstGeom>
+          <a:noFill/>
+        </p:spPr>
+        <p:txBody>
+          <a:bodyPr wrap="square" anchor="ctr">
+            <a:spAutoFit/>
+          </a:bodyPr>
+          <a:lstStyle/>
+          <a:p>
+            <a:pPr algn="l">
+              <a:defRPr sz="1800" b="0">
+                <a:solidFill>
+                  <a:srgbClr val="FFFFFF"/>
+                </a:solidFill>
+                <a:latin typeface="Inter"/>
+              </a:defRPr>
+            </a:pPr>
+            <a:r>
+              <a:t>R², Adj-R², and Pred-R² should be close and high</a:t>
+            </a:r>
+          </a:p>
+        </p:txBody>
+      </p:sp>
+      <p:sp>
+        <p:nvSpPr>
+          <p:cNvPr id="17" name="Rounded Rectangle 16"/>
+          <p:cNvSpPr/>
+          <p:nvPr/>
+        </p:nvSpPr>
+        <p:spPr>
+          <a:xfrm>
+            <a:off x="731520" y="4828032"/>
+            <a:ext cx="10515600" cy="777240"/>
+          </a:xfrm>
+          <a:prstGeom prst="roundRect">
+            <a:avLst/>
+          </a:prstGeom>
+          <a:solidFill>
+            <a:srgbClr val="312E81"/>
+          </a:solidFill>
+          <a:ln>
+            <a:noFill/>
+          </a:ln>
+        </p:spPr>
+        <p:style>
+          <a:lnRef idx="1">
+            <a:schemeClr val="accent1"/>
+          </a:lnRef>
+          <a:fillRef idx="3">
+            <a:schemeClr val="accent1"/>
+          </a:fillRef>
+          <a:effectRef idx="2">
+            <a:schemeClr val="accent1"/>
+          </a:effectRef>
+          <a:fontRef idx="minor">
+            <a:schemeClr val="lt1"/>
+          </a:fontRef>
+        </p:style>
+        <p:txBody>
+          <a:bodyPr rtlCol="0" anchor="ctr"/>
+          <a:lstStyle/>
+          <a:p>
+            <a:pPr algn="ctr"/>
+          </a:p>
+        </p:txBody>
+      </p:sp>
+      <p:sp>
+        <p:nvSpPr>
+          <p:cNvPr id="18" name="Oval 17"/>
+          <p:cNvSpPr/>
+          <p:nvPr/>
+        </p:nvSpPr>
+        <p:spPr>
+          <a:xfrm>
+            <a:off x="1005840" y="5056632"/>
+            <a:ext cx="320040" cy="320040"/>
+          </a:xfrm>
+          <a:prstGeom prst="ellipse">
+            <a:avLst/>
+          </a:prstGeom>
+          <a:solidFill>
+            <a:srgbClr val="5046E5"/>
+          </a:solidFill>
+          <a:ln>
+            <a:noFill/>
+          </a:ln>
+        </p:spPr>
+        <p:style>
+          <a:lnRef idx="1">
+            <a:schemeClr val="accent1"/>
+          </a:lnRef>
+          <a:fillRef idx="3">
+            <a:schemeClr val="accent1"/>
+          </a:fillRef>
+          <a:effectRef idx="2">
+            <a:schemeClr val="accent1"/>
+          </a:effectRef>
+          <a:fontRef idx="minor">
+            <a:schemeClr val="lt1"/>
+          </a:fontRef>
+        </p:style>
+        <p:txBody>
+          <a:bodyPr rtlCol="0" anchor="ctr"/>
+          <a:lstStyle/>
+          <a:p>
+            <a:pPr algn="ctr"/>
+          </a:p>
+        </p:txBody>
+      </p:sp>
+      <p:sp>
+        <p:nvSpPr>
+          <p:cNvPr id="19" name="TextBox 18"/>
+          <p:cNvSpPr txBox="1"/>
+          <p:nvPr/>
+        </p:nvSpPr>
+        <p:spPr>
+          <a:xfrm>
+            <a:off x="1554480" y="4873752"/>
+            <a:ext cx="9418320" cy="777240"/>
+          </a:xfrm>
+          <a:prstGeom prst="rect">
+            <a:avLst/>
+          </a:prstGeom>
+          <a:noFill/>
+        </p:spPr>
+        <p:txBody>
+          <a:bodyPr wrap="square" anchor="ctr">
+            <a:spAutoFit/>
+          </a:bodyPr>
+          <a:lstStyle/>
+          <a:p>
+            <a:pPr algn="l">
+              <a:defRPr sz="1800" b="0">
+                <a:solidFill>
+                  <a:srgbClr val="FFFFFF"/>
+                </a:solidFill>
+                <a:latin typeface="Inter"/>
+              </a:defRPr>
+            </a:pPr>
+            <a:r>
+              <a:t>doe report creates shareable HTML reports with all results</a:t>
+            </a:r>
+          </a:p>
+        </p:txBody>
+      </p:sp>
+      <p:sp>
+        <p:nvSpPr>
+          <p:cNvPr id="20" name="TextBox 19"/>
+          <p:cNvSpPr txBox="1"/>
+          <p:nvPr/>
+        </p:nvSpPr>
+        <p:spPr>
+          <a:xfrm>
+            <a:off x="731520" y="6400800"/>
+            <a:ext cx="10058400" cy="365760"/>
+          </a:xfrm>
+          <a:prstGeom prst="rect">
+            <a:avLst/>
+          </a:prstGeom>
+          <a:noFill/>
+        </p:spPr>
+        <p:txBody>
+          <a:bodyPr wrap="square">
+            <a:spAutoFit/>
+          </a:bodyPr>
+          <a:lstStyle/>
+          <a:p>
+            <a:pPr algn="l">
+              <a:defRPr sz="1000" b="0">
+                <a:solidFill>
+                  <a:srgbClr val="6366F1"/>
                 </a:solidFill>
                 <a:latin typeface="Consolas"/>
               </a:defRPr>
             </a:pPr>
             <a:r>
-              <a:t>$ doe report reactor_rsm/</a:t>
-            </a:r>
-          </a:p>
-          <a:p>
-            <a:pPr>
-              <a:spcAft>
-                <a:spcPts val="200"/>
-              </a:spcAft>
-              <a:defRPr sz="1800">
-                <a:solidFill>
-                  <a:srgbClr val="D4D4D4"/>
-                </a:solidFill>
-                <a:latin typeface="Consolas"/>
-              </a:defRPr>
-            </a:pPr>
-          </a:p>
-          <a:p>
-            <a:pPr>
-              <a:spcAft>
-                <a:spcPts val="200"/>
-              </a:spcAft>
-              <a:defRPr sz="1800">
-                <a:solidFill>
-                  <a:srgbClr val="D4D4D4"/>
-                </a:solidFill>
-                <a:latin typeface="Consolas"/>
-              </a:defRPr>
-            </a:pPr>
-            <a:r>
-              <a:t>Report generated: reactor_rsm/report.html</a:t>
-            </a:r>
-          </a:p>
-          <a:p>
-            <a:pPr>
-              <a:spcAft>
-                <a:spcPts val="200"/>
-              </a:spcAft>
-              <a:defRPr sz="1800">
-                <a:solidFill>
-                  <a:srgbClr val="D4D4D4"/>
-                </a:solidFill>
-                <a:latin typeface="Consolas"/>
-              </a:defRPr>
-            </a:pPr>
-          </a:p>
-          <a:p>
-            <a:pPr>
-              <a:spcAft>
-                <a:spcPts val="200"/>
-              </a:spcAft>
-              <a:defRPr sz="1800">
-                <a:solidFill>
-                  <a:srgbClr val="D4D4D4"/>
-                </a:solidFill>
-                <a:latin typeface="Consolas"/>
-              </a:defRPr>
-            </a:pPr>
-            <a:r>
-              <a:t># The report includes:</a:t>
-            </a:r>
-          </a:p>
-          <a:p>
-            <a:pPr>
-              <a:spcAft>
-                <a:spcPts val="200"/>
-              </a:spcAft>
-              <a:defRPr sz="1800">
-                <a:solidFill>
-                  <a:srgbClr val="D4D4D4"/>
-                </a:solidFill>
-                <a:latin typeface="Consolas"/>
-              </a:defRPr>
-            </a:pPr>
-            <a:r>
-              <a:t>#   - Executive summary with key findings</a:t>
-            </a:r>
-          </a:p>
-          <a:p>
-            <a:pPr>
-              <a:spcAft>
-                <a:spcPts val="200"/>
-              </a:spcAft>
-              <a:defRPr sz="1800">
-                <a:solidFill>
-                  <a:srgbClr val="D4D4D4"/>
-                </a:solidFill>
-                <a:latin typeface="Consolas"/>
-              </a:defRPr>
-            </a:pPr>
-            <a:r>
-              <a:t>#   - Interactive plots (zoom, hover, pan)</a:t>
-            </a:r>
-          </a:p>
-          <a:p>
-            <a:pPr>
-              <a:spcAft>
-                <a:spcPts val="200"/>
-              </a:spcAft>
-              <a:defRPr sz="1800">
-                <a:solidFill>
-                  <a:srgbClr val="D4D4D4"/>
-                </a:solidFill>
-                <a:latin typeface="Consolas"/>
-              </a:defRPr>
-            </a:pPr>
-            <a:r>
-              <a:t>#   - Full ANOVA table</a:t>
-            </a:r>
-          </a:p>
-          <a:p>
-            <a:pPr>
-              <a:spcAft>
-                <a:spcPts val="200"/>
-              </a:spcAft>
-              <a:defRPr sz="1800">
-                <a:solidFill>
-                  <a:srgbClr val="D4D4D4"/>
-                </a:solidFill>
-                <a:latin typeface="Consolas"/>
-              </a:defRPr>
-            </a:pPr>
-            <a:r>
-              <a:t>#   - Effect estimates and confidence intervals</a:t>
-            </a:r>
-          </a:p>
-          <a:p>
-            <a:pPr>
-              <a:spcAft>
-                <a:spcPts val="200"/>
-              </a:spcAft>
-              <a:defRPr sz="1800">
-                <a:solidFill>
-                  <a:srgbClr val="D4D4D4"/>
-                </a:solidFill>
-                <a:latin typeface="Consolas"/>
-              </a:defRPr>
-            </a:pPr>
-            <a:r>
-              <a:t>#   - Residual diagnostics</a:t>
-            </a:r>
-          </a:p>
-          <a:p>
-            <a:pPr>
-              <a:spcAft>
-                <a:spcPts val="200"/>
-              </a:spcAft>
-              <a:defRPr sz="1800">
-                <a:solidFill>
-                  <a:srgbClr val="D4D4D4"/>
-                </a:solidFill>
-                <a:latin typeface="Consolas"/>
-              </a:defRPr>
-            </a:pPr>
-            <a:r>
-              <a:t>#   - Response surface plots (for RSM designs)</a:t>
-            </a:r>
-          </a:p>
-          <a:p>
-            <a:pPr>
-              <a:spcAft>
-                <a:spcPts val="200"/>
-              </a:spcAft>
-              <a:defRPr sz="1800">
-                <a:solidFill>
-                  <a:srgbClr val="D4D4D4"/>
-                </a:solidFill>
-                <a:latin typeface="Consolas"/>
-              </a:defRPr>
-            </a:pPr>
-            <a:r>
-              <a:t>#   - Optimal settings (if doe optimize was run)</a:t>
-            </a:r>
-          </a:p>
-          <a:p>
-            <a:pPr>
-              <a:spcAft>
-                <a:spcPts val="200"/>
-              </a:spcAft>
-              <a:defRPr sz="1800">
-                <a:solidFill>
-                  <a:srgbClr val="D4D4D4"/>
-                </a:solidFill>
-                <a:latin typeface="Consolas"/>
-              </a:defRPr>
-            </a:pPr>
-            <a:r>
-              <a:t>#   - Self-contained single HTML file -- easy to share</a:t>
+              <a:t>© 2026 Martin J. Gallagher  |  GPL-3.0-or-later</a:t>
             </a:r>
           </a:p>
         </p:txBody>
@@ -3987,7 +4793,7 @@
     <p:bg>
       <p:bgPr>
         <a:solidFill>
-          <a:srgbClr val="1A1A2E"/>
+          <a:srgbClr val="FAFAFA"/>
         </a:solidFill>
         <a:effectLst/>
       </p:bgPr>
@@ -4001,56 +4807,20 @@
       <p:grpSpPr/>
       <p:sp>
         <p:nvSpPr>
-          <p:cNvPr id="2" name="TextBox 1"/>
-          <p:cNvSpPr txBox="1"/>
-          <p:nvPr/>
-        </p:nvSpPr>
-        <p:spPr>
-          <a:xfrm>
-            <a:off x="731520" y="457200"/>
-            <a:ext cx="10515600" cy="914400"/>
+          <p:cNvPr id="2" name="Rectangle 1"/>
+          <p:cNvSpPr/>
+          <p:nvPr/>
+        </p:nvSpPr>
+        <p:spPr>
+          <a:xfrm>
+            <a:off x="0" y="0"/>
+            <a:ext cx="12191695" cy="45720"/>
           </a:xfrm>
           <a:prstGeom prst="rect">
             <a:avLst/>
           </a:prstGeom>
-          <a:noFill/>
-        </p:spPr>
-        <p:txBody>
-          <a:bodyPr wrap="none">
-            <a:spAutoFit/>
-          </a:bodyPr>
-          <a:lstStyle/>
-          <a:p>
-            <a:pPr>
-              <a:defRPr sz="3400" b="1">
-                <a:solidFill>
-                  <a:srgbClr val="FFFFFF"/>
-                </a:solidFill>
-                <a:latin typeface="Calibri"/>
-              </a:defRPr>
-            </a:pPr>
-            <a:r>
-              <a:t>Key Takeaways</a:t>
-            </a:r>
-          </a:p>
-        </p:txBody>
-      </p:sp>
-      <p:sp>
-        <p:nvSpPr>
-          <p:cNvPr id="3" name="Rounded Rectangle 2"/>
-          <p:cNvSpPr/>
-          <p:nvPr/>
-        </p:nvSpPr>
-        <p:spPr>
-          <a:xfrm>
-            <a:off x="731520" y="1645920"/>
-            <a:ext cx="10515600" cy="822960"/>
-          </a:xfrm>
-          <a:prstGeom prst="roundRect">
-            <a:avLst/>
-          </a:prstGeom>
           <a:solidFill>
-            <a:srgbClr val="2A2A4A"/>
+            <a:srgbClr val="D97706"/>
           </a:solidFill>
           <a:ln>
             <a:noFill/>
@@ -4071,39 +4841,29 @@
           </a:fontRef>
         </p:style>
         <p:txBody>
-          <a:bodyPr rtlCol="0" anchor="ctr" lIns="274320"/>
-          <a:lstStyle/>
-          <a:p>
-            <a:pPr algn="ctr">
-              <a:defRPr sz="2200">
-                <a:solidFill>
-                  <a:srgbClr val="FFFFFF"/>
-                </a:solidFill>
-                <a:latin typeface="Calibri"/>
-              </a:defRPr>
-            </a:pPr>
-            <a:r>
-              <a:t>doe analyze automates the entire analysis pipeline</a:t>
-            </a:r>
-          </a:p>
-        </p:txBody>
-      </p:sp>
-      <p:sp>
-        <p:nvSpPr>
-          <p:cNvPr id="4" name="Rounded Rectangle 3"/>
+          <a:bodyPr rtlCol="0" anchor="ctr"/>
+          <a:lstStyle/>
+          <a:p>
+            <a:pPr algn="ctr"/>
+          </a:p>
+        </p:txBody>
+      </p:sp>
+      <p:sp>
+        <p:nvSpPr>
+          <p:cNvPr id="3" name="Rounded Rectangle 2"/>
           <p:cNvSpPr/>
           <p:nvPr/>
         </p:nvSpPr>
         <p:spPr>
           <a:xfrm>
-            <a:off x="731520" y="2606040"/>
-            <a:ext cx="10515600" cy="822960"/>
+            <a:off x="548640" y="274320"/>
+            <a:ext cx="2194560" cy="457200"/>
           </a:xfrm>
           <a:prstGeom prst="roundRect">
             <a:avLst/>
           </a:prstGeom>
           <a:solidFill>
-            <a:srgbClr val="2A2A4A"/>
+            <a:srgbClr val="D97706"/>
           </a:solidFill>
           <a:ln>
             <a:noFill/>
@@ -4124,19 +4884,55 @@
           </a:fontRef>
         </p:style>
         <p:txBody>
-          <a:bodyPr rtlCol="0" anchor="ctr" lIns="274320"/>
+          <a:bodyPr rtlCol="0" anchor="ctr"/>
           <a:lstStyle/>
           <a:p>
             <a:pPr algn="ctr">
-              <a:defRPr sz="2200">
+              <a:defRPr sz="1300" b="1">
                 <a:solidFill>
                   <a:srgbClr val="FFFFFF"/>
                 </a:solidFill>
-                <a:latin typeface="Calibri"/>
-              </a:defRPr>
-            </a:pPr>
-            <a:r>
-              <a:t>Pareto chart: quick visual ID of significant factors</a:t>
+                <a:latin typeface="Consolas"/>
+              </a:defRPr>
+            </a:pPr>
+            <a:r>
+              <a:t>HANDS-ON EXERCISE</a:t>
+            </a:r>
+          </a:p>
+        </p:txBody>
+      </p:sp>
+      <p:sp>
+        <p:nvSpPr>
+          <p:cNvPr id="4" name="TextBox 3"/>
+          <p:cNvSpPr txBox="1"/>
+          <p:nvPr/>
+        </p:nvSpPr>
+        <p:spPr>
+          <a:xfrm>
+            <a:off x="3017520" y="274320"/>
+            <a:ext cx="8229600" cy="548640"/>
+          </a:xfrm>
+          <a:prstGeom prst="rect">
+            <a:avLst/>
+          </a:prstGeom>
+          <a:noFill/>
+        </p:spPr>
+        <p:txBody>
+          <a:bodyPr wrap="square">
+            <a:spAutoFit/>
+          </a:bodyPr>
+          <a:lstStyle/>
+          <a:p>
+            <a:pPr algn="l">
+              <a:defRPr sz="2600" b="1">
+                <a:solidFill>
+                  <a:srgbClr val="111111"/>
+                </a:solidFill>
+                <a:latin typeface="Inter"/>
+              </a:defRPr>
+            </a:pPr>
+            <a:r>
+              <a:t>Exercise 6: Analyse and Interpret</a:t>
             </a:r>
           </a:p>
         </p:txBody>
@@ -4149,14 +4945,14 @@
         </p:nvSpPr>
         <p:spPr>
           <a:xfrm>
-            <a:off x="731520" y="3566160"/>
-            <a:ext cx="10515600" cy="822960"/>
+            <a:off x="548640" y="1005840"/>
+            <a:ext cx="10972800" cy="5120640"/>
           </a:xfrm>
           <a:prstGeom prst="roundRect">
             <a:avLst/>
           </a:prstGeom>
           <a:solidFill>
-            <a:srgbClr val="2A2A4A"/>
+            <a:srgbClr val="FFFBEB"/>
           </a:solidFill>
           <a:ln>
             <a:noFill/>
@@ -4177,39 +4973,29 @@
           </a:fontRef>
         </p:style>
         <p:txBody>
-          <a:bodyPr rtlCol="0" anchor="ctr" lIns="274320"/>
-          <a:lstStyle/>
-          <a:p>
-            <a:pPr algn="ctr">
-              <a:defRPr sz="2200">
-                <a:solidFill>
-                  <a:srgbClr val="FFFFFF"/>
-                </a:solidFill>
-                <a:latin typeface="Calibri"/>
-              </a:defRPr>
-            </a:pPr>
-            <a:r>
-              <a:t>Always check residual plots for model adequacy</a:t>
-            </a:r>
-          </a:p>
-        </p:txBody>
-      </p:sp>
-      <p:sp>
-        <p:nvSpPr>
-          <p:cNvPr id="6" name="Rounded Rectangle 5"/>
+          <a:bodyPr rtlCol="0" anchor="ctr"/>
+          <a:lstStyle/>
+          <a:p>
+            <a:pPr algn="ctr"/>
+          </a:p>
+        </p:txBody>
+      </p:sp>
+      <p:sp>
+        <p:nvSpPr>
+          <p:cNvPr id="6" name="Rectangle 5"/>
           <p:cNvSpPr/>
           <p:nvPr/>
         </p:nvSpPr>
         <p:spPr>
           <a:xfrm>
-            <a:off x="731520" y="4526280"/>
-            <a:ext cx="10515600" cy="822960"/>
-          </a:xfrm>
-          <a:prstGeom prst="roundRect">
+            <a:off x="548640" y="1005840"/>
+            <a:ext cx="36576" cy="5120640"/>
+          </a:xfrm>
+          <a:prstGeom prst="rect">
             <a:avLst/>
           </a:prstGeom>
           <a:solidFill>
-            <a:srgbClr val="2A2A4A"/>
+            <a:srgbClr val="D97706"/>
           </a:solidFill>
           <a:ln>
             <a:noFill/>
@@ -4230,138 +5016,6 @@
           </a:fontRef>
         </p:style>
         <p:txBody>
-          <a:bodyPr rtlCol="0" anchor="ctr" lIns="274320"/>
-          <a:lstStyle/>
-          <a:p>
-            <a:pPr algn="ctr">
-              <a:defRPr sz="2200">
-                <a:solidFill>
-                  <a:srgbClr val="FFFFFF"/>
-                </a:solidFill>
-                <a:latin typeface="Calibri"/>
-              </a:defRPr>
-            </a:pPr>
-            <a:r>
-              <a:t>R^2, Adj-R^2, and Pred-R^2 should be close and high</a:t>
-            </a:r>
-          </a:p>
-        </p:txBody>
-      </p:sp>
-      <p:sp>
-        <p:nvSpPr>
-          <p:cNvPr id="7" name="Rounded Rectangle 6"/>
-          <p:cNvSpPr/>
-          <p:nvPr/>
-        </p:nvSpPr>
-        <p:spPr>
-          <a:xfrm>
-            <a:off x="731520" y="5486400"/>
-            <a:ext cx="10515600" cy="822960"/>
-          </a:xfrm>
-          <a:prstGeom prst="roundRect">
-            <a:avLst/>
-          </a:prstGeom>
-          <a:solidFill>
-            <a:srgbClr val="2A2A4A"/>
-          </a:solidFill>
-          <a:ln>
-            <a:noFill/>
-          </a:ln>
-        </p:spPr>
-        <p:style>
-          <a:lnRef idx="1">
-            <a:schemeClr val="accent1"/>
-          </a:lnRef>
-          <a:fillRef idx="3">
-            <a:schemeClr val="accent1"/>
-          </a:fillRef>
-          <a:effectRef idx="2">
-            <a:schemeClr val="accent1"/>
-          </a:effectRef>
-          <a:fontRef idx="minor">
-            <a:schemeClr val="lt1"/>
-          </a:fontRef>
-        </p:style>
-        <p:txBody>
-          <a:bodyPr rtlCol="0" anchor="ctr" lIns="274320"/>
-          <a:lstStyle/>
-          <a:p>
-            <a:pPr algn="ctr">
-              <a:defRPr sz="2200">
-                <a:solidFill>
-                  <a:srgbClr val="FFFFFF"/>
-                </a:solidFill>
-                <a:latin typeface="Calibri"/>
-              </a:defRPr>
-            </a:pPr>
-            <a:r>
-              <a:t>doe report creates shareable HTML reports with all results</a:t>
-            </a:r>
-          </a:p>
-        </p:txBody>
-      </p:sp>
-    </p:spTree>
-  </p:cSld>
-  <p:clrMapOvr>
-    <a:masterClrMapping/>
-  </p:clrMapOvr>
-</p:sld>
-</file>
-
-<file path=ppt/slides/slide13.xml><?xml version="1.0" encoding="utf-8"?>
-<p:sld xmlns:a="http://schemas.openxmlformats.org/drawingml/2006/main" xmlns:p="http://schemas.openxmlformats.org/presentationml/2006/main" xmlns:r="http://schemas.openxmlformats.org/officeDocument/2006/relationships">
-  <p:cSld>
-    <p:bg>
-      <p:bgPr>
-        <a:solidFill>
-          <a:srgbClr val="FFFFFF"/>
-        </a:solidFill>
-        <a:effectLst/>
-      </p:bgPr>
-    </p:bg>
-    <p:spTree>
-      <p:nvGrpSpPr>
-        <p:cNvPr id="1" name=""/>
-        <p:cNvGrpSpPr/>
-        <p:nvPr/>
-      </p:nvGrpSpPr>
-      <p:grpSpPr/>
-      <p:sp>
-        <p:nvSpPr>
-          <p:cNvPr id="2" name="Rectangle 1"/>
-          <p:cNvSpPr/>
-          <p:nvPr/>
-        </p:nvSpPr>
-        <p:spPr>
-          <a:xfrm>
-            <a:off x="0" y="0"/>
-            <a:ext cx="12191695" cy="54864"/>
-          </a:xfrm>
-          <a:prstGeom prst="rect">
-            <a:avLst/>
-          </a:prstGeom>
-          <a:solidFill>
-            <a:srgbClr val="FF8C00"/>
-          </a:solidFill>
-          <a:ln>
-            <a:noFill/>
-          </a:ln>
-        </p:spPr>
-        <p:style>
-          <a:lnRef idx="1">
-            <a:schemeClr val="accent1"/>
-          </a:lnRef>
-          <a:fillRef idx="3">
-            <a:schemeClr val="accent1"/>
-          </a:fillRef>
-          <a:effectRef idx="2">
-            <a:schemeClr val="accent1"/>
-          </a:effectRef>
-          <a:fontRef idx="minor">
-            <a:schemeClr val="lt1"/>
-          </a:fontRef>
-        </p:style>
-        <p:txBody>
           <a:bodyPr rtlCol="0" anchor="ctr"/>
           <a:lstStyle/>
           <a:p>
@@ -4371,103 +5025,14 @@
       </p:sp>
       <p:sp>
         <p:nvSpPr>
-          <p:cNvPr id="3" name="Rounded Rectangle 2"/>
-          <p:cNvSpPr/>
-          <p:nvPr/>
-        </p:nvSpPr>
-        <p:spPr>
-          <a:xfrm>
-            <a:off x="731520" y="320040"/>
-            <a:ext cx="2011680" cy="502920"/>
-          </a:xfrm>
-          <a:prstGeom prst="roundRect">
-            <a:avLst/>
-          </a:prstGeom>
-          <a:solidFill>
-            <a:srgbClr val="FF8C00"/>
-          </a:solidFill>
-          <a:ln>
-            <a:noFill/>
-          </a:ln>
-        </p:spPr>
-        <p:style>
-          <a:lnRef idx="1">
-            <a:schemeClr val="accent1"/>
-          </a:lnRef>
-          <a:fillRef idx="3">
-            <a:schemeClr val="accent1"/>
-          </a:fillRef>
-          <a:effectRef idx="2">
-            <a:schemeClr val="accent1"/>
-          </a:effectRef>
-          <a:fontRef idx="minor">
-            <a:schemeClr val="lt1"/>
-          </a:fontRef>
-        </p:style>
-        <p:txBody>
-          <a:bodyPr rtlCol="0" anchor="ctr"/>
-          <a:lstStyle/>
-          <a:p>
-            <a:pPr algn="ctr">
-              <a:defRPr sz="1400" b="1">
-                <a:solidFill>
-                  <a:srgbClr val="FFFFFF"/>
-                </a:solidFill>
-                <a:latin typeface="Calibri"/>
-              </a:defRPr>
-            </a:pPr>
-            <a:r>
-              <a:t>HANDS-ON EXERCISE</a:t>
-            </a:r>
-          </a:p>
-        </p:txBody>
-      </p:sp>
-      <p:sp>
-        <p:nvSpPr>
-          <p:cNvPr id="4" name="TextBox 3"/>
+          <p:cNvPr id="7" name="TextBox 6"/>
           <p:cNvSpPr txBox="1"/>
           <p:nvPr/>
         </p:nvSpPr>
         <p:spPr>
           <a:xfrm>
-            <a:off x="3017520" y="320040"/>
-            <a:ext cx="8229600" cy="731520"/>
-          </a:xfrm>
-          <a:prstGeom prst="rect">
-            <a:avLst/>
-          </a:prstGeom>
-          <a:noFill/>
-        </p:spPr>
-        <p:txBody>
-          <a:bodyPr wrap="none">
-            <a:spAutoFit/>
-          </a:bodyPr>
-          <a:lstStyle/>
-          <a:p>
-            <a:pPr>
-              <a:defRPr sz="3000" b="1">
-                <a:solidFill>
-                  <a:srgbClr val="222222"/>
-                </a:solidFill>
-                <a:latin typeface="Calibri"/>
-              </a:defRPr>
-            </a:pPr>
-            <a:r>
-              <a:t>Exercise 6: Analyse and Interpret</a:t>
-            </a:r>
-          </a:p>
-        </p:txBody>
-      </p:sp>
-      <p:sp>
-        <p:nvSpPr>
-          <p:cNvPr id="5" name="TextBox 4"/>
-          <p:cNvSpPr txBox="1"/>
-          <p:nvPr/>
-        </p:nvSpPr>
-        <p:spPr>
-          <a:xfrm>
-            <a:off x="914400" y="1371600"/>
-            <a:ext cx="10058400" cy="5029200"/>
+            <a:off x="822960" y="1143000"/>
+            <a:ext cx="10424160" cy="4846320"/>
           </a:xfrm>
           <a:prstGeom prst="rect">
             <a:avLst/>
@@ -4482,206 +5047,194 @@
           <a:p>
             <a:pPr>
               <a:spcAft>
-                <a:spcPts val="600"/>
+                <a:spcPts val="500"/>
               </a:spcAft>
-              <a:defRPr sz="2000">
-                <a:solidFill>
-                  <a:srgbClr val="222222"/>
-                </a:solidFill>
-                <a:latin typeface="Calibri"/>
-              </a:defRPr>
-            </a:pPr>
-            <a:r>
-              <a:t>Use the reactor_optimization experiment from Exercise 5.</a:t>
+              <a:defRPr sz="1700">
+                <a:solidFill>
+                  <a:srgbClr val="333333"/>
+                </a:solidFill>
+                <a:latin typeface="Inter"/>
+              </a:defRPr>
+            </a:pPr>
+            <a:r>
+              <a:t>Use the reactor experiment from Exercise 5.</a:t>
             </a:r>
           </a:p>
           <a:p>
             <a:pPr>
               <a:spcAft>
-                <a:spcPts val="600"/>
+                <a:spcPts val="500"/>
               </a:spcAft>
-              <a:defRPr sz="2000">
-                <a:solidFill>
-                  <a:srgbClr val="222222"/>
-                </a:solidFill>
-                <a:latin typeface="Calibri"/>
+              <a:defRPr sz="1700">
+                <a:solidFill>
+                  <a:srgbClr val="333333"/>
+                </a:solidFill>
+                <a:latin typeface="Inter"/>
               </a:defRPr>
             </a:pPr>
           </a:p>
           <a:p>
             <a:pPr>
               <a:spcAft>
-                <a:spcPts val="600"/>
+                <a:spcPts val="500"/>
               </a:spcAft>
-              <a:defRPr sz="2000">
-                <a:solidFill>
-                  <a:srgbClr val="222222"/>
-                </a:solidFill>
-                <a:latin typeface="Calibri"/>
-              </a:defRPr>
-            </a:pPr>
-            <a:r>
-              <a:t>1. Run: doe analyze reactor_optimization/</a:t>
+              <a:defRPr sz="1700">
+                <a:solidFill>
+                  <a:srgbClr val="333333"/>
+                </a:solidFill>
+                <a:latin typeface="Inter"/>
+              </a:defRPr>
+            </a:pPr>
+            <a:r>
+              <a:t>1. Run:  doe analyze reactor_rsm/</a:t>
             </a:r>
           </a:p>
           <a:p>
             <a:pPr>
               <a:spcAft>
-                <a:spcPts val="600"/>
+                <a:spcPts val="500"/>
               </a:spcAft>
-              <a:defRPr sz="2000">
-                <a:solidFill>
-                  <a:srgbClr val="222222"/>
-                </a:solidFill>
-                <a:latin typeface="Calibri"/>
-              </a:defRPr>
-            </a:pPr>
-            <a:r>
-              <a:t>2. Examine the ANOVA table:</a:t>
+              <a:defRPr sz="1700">
+                <a:solidFill>
+                  <a:srgbClr val="333333"/>
+                </a:solidFill>
+                <a:latin typeface="Inter"/>
+              </a:defRPr>
+            </a:pPr>
+            <a:r>
+              <a:t>2. ANOVA: which factors are significant at p &lt; 0.05?</a:t>
+            </a:r>
+          </a:p>
+          <a:p>
+            <a:pPr>
+              <a:spcAft>
+                <a:spcPts val="500"/>
+              </a:spcAft>
+              <a:defRPr sz="1700">
+                <a:solidFill>
+                  <a:srgbClr val="333333"/>
+                </a:solidFill>
+                <a:latin typeface="Inter"/>
+              </a:defRPr>
+            </a:pPr>
+            <a:r>
+              <a:t>3. Pareto chart: do the results agree with ANOVA?</a:t>
+            </a:r>
+          </a:p>
+          <a:p>
+            <a:pPr>
+              <a:spcAft>
+                <a:spcPts val="500"/>
+              </a:spcAft>
+              <a:defRPr sz="1700">
+                <a:solidFill>
+                  <a:srgbClr val="333333"/>
+                </a:solidFill>
+                <a:latin typeface="Inter"/>
+              </a:defRPr>
+            </a:pPr>
+            <a:r>
+              <a:t>4. Residual diagnostics:</a:t>
             </a:r>
           </a:p>
           <a:p>
             <a:pPr lvl="1">
               <a:spcAft>
-                <a:spcPts val="600"/>
+                <a:spcPts val="500"/>
               </a:spcAft>
-              <a:defRPr sz="1800">
-                <a:solidFill>
-                  <a:srgbClr val="222222"/>
-                </a:solidFill>
-                <a:latin typeface="Calibri"/>
-              </a:defRPr>
-            </a:pPr>
-            <a:r>
-              <a:t>Which factors are significant at p &lt; 0.05?</a:t>
+              <a:defRPr sz="1500">
+                <a:solidFill>
+                  <a:srgbClr val="666666"/>
+                </a:solidFill>
+                <a:latin typeface="Inter"/>
+              </a:defRPr>
+            </a:pPr>
+            <a:r>
+              <a:t>Any patterns in residuals vs. fitted?</a:t>
             </a:r>
           </a:p>
           <a:p>
             <a:pPr lvl="1">
               <a:spcAft>
-                <a:spcPts val="600"/>
+                <a:spcPts val="500"/>
               </a:spcAft>
-              <a:defRPr sz="1800">
-                <a:solidFill>
-                  <a:srgbClr val="222222"/>
-                </a:solidFill>
-                <a:latin typeface="Calibri"/>
-              </a:defRPr>
-            </a:pPr>
-            <a:r>
-              <a:t>What is the % contribution of each factor?</a:t>
+              <a:defRPr sz="1500">
+                <a:solidFill>
+                  <a:srgbClr val="666666"/>
+                </a:solidFill>
+                <a:latin typeface="Inter"/>
+              </a:defRPr>
+            </a:pPr>
+            <a:r>
+              <a:t>Do residuals follow a normal distribution?</a:t>
             </a:r>
           </a:p>
           <a:p>
             <a:pPr>
               <a:spcAft>
-                <a:spcPts val="600"/>
+                <a:spcPts val="500"/>
               </a:spcAft>
-              <a:defRPr sz="2000">
-                <a:solidFill>
-                  <a:srgbClr val="222222"/>
-                </a:solidFill>
-                <a:latin typeface="Calibri"/>
-              </a:defRPr>
-            </a:pPr>
-            <a:r>
-              <a:t>3. Look at the Pareto chart: do the results agree?</a:t>
+              <a:defRPr sz="1700">
+                <a:solidFill>
+                  <a:srgbClr val="333333"/>
+                </a:solidFill>
+                <a:latin typeface="Inter"/>
+              </a:defRPr>
+            </a:pPr>
+            <a:r>
+              <a:t>5. Run:  doe report reactor_rsm/</a:t>
             </a:r>
           </a:p>
           <a:p>
             <a:pPr>
               <a:spcAft>
-                <a:spcPts val="600"/>
+                <a:spcPts val="500"/>
               </a:spcAft>
-              <a:defRPr sz="2000">
-                <a:solidFill>
-                  <a:srgbClr val="222222"/>
-                </a:solidFill>
-                <a:latin typeface="Calibri"/>
-              </a:defRPr>
-            </a:pPr>
-            <a:r>
-              <a:t>4. Check the residual diagnostics:</a:t>
-            </a:r>
-          </a:p>
-          <a:p>
-            <a:pPr lvl="1">
-              <a:spcAft>
-                <a:spcPts val="600"/>
-              </a:spcAft>
-              <a:defRPr sz="1800">
-                <a:solidFill>
-                  <a:srgbClr val="222222"/>
-                </a:solidFill>
-                <a:latin typeface="Calibri"/>
-              </a:defRPr>
-            </a:pPr>
-            <a:r>
-              <a:t>Are there patterns in residuals vs. fitted values?</a:t>
-            </a:r>
-          </a:p>
-          <a:p>
-            <a:pPr lvl="1">
-              <a:spcAft>
-                <a:spcPts val="600"/>
-              </a:spcAft>
-              <a:defRPr sz="1800">
-                <a:solidFill>
-                  <a:srgbClr val="222222"/>
-                </a:solidFill>
-                <a:latin typeface="Calibri"/>
-              </a:defRPr>
-            </a:pPr>
-            <a:r>
-              <a:t>Do residuals follow a normal distribution?</a:t>
-            </a:r>
-          </a:p>
-          <a:p>
-            <a:pPr>
-              <a:spcAft>
-                <a:spcPts val="600"/>
-              </a:spcAft>
-              <a:defRPr sz="2000">
-                <a:solidFill>
-                  <a:srgbClr val="222222"/>
-                </a:solidFill>
-                <a:latin typeface="Calibri"/>
-              </a:defRPr>
-            </a:pPr>
-            <a:r>
-              <a:t>5. Run: doe report reactor_optimization/</a:t>
-            </a:r>
-          </a:p>
-          <a:p>
-            <a:pPr lvl="1">
-              <a:spcAft>
-                <a:spcPts val="600"/>
-              </a:spcAft>
-              <a:defRPr sz="1800">
-                <a:solidFill>
-                  <a:srgbClr val="222222"/>
-                </a:solidFill>
-                <a:latin typeface="Calibri"/>
-              </a:defRPr>
-            </a:pPr>
-            <a:r>
-              <a:t>Open the HTML report and explore the interactive plots</a:t>
-            </a:r>
-          </a:p>
-          <a:p>
-            <a:pPr>
-              <a:spcAft>
-                <a:spcPts val="600"/>
-              </a:spcAft>
-              <a:defRPr sz="2000">
-                <a:solidFill>
-                  <a:srgbClr val="222222"/>
-                </a:solidFill>
-                <a:latin typeface="Calibri"/>
-              </a:defRPr>
-            </a:pPr>
-            <a:r>
-              <a:t>6. Write a brief summary: What factors matter? Any interactions?</a:t>
+              <a:defRPr sz="1700">
+                <a:solidFill>
+                  <a:srgbClr val="333333"/>
+                </a:solidFill>
+                <a:latin typeface="Inter"/>
+              </a:defRPr>
+            </a:pPr>
+            <a:r>
+              <a:t>6. Write a 3-sentence executive summary</a:t>
+            </a:r>
+          </a:p>
+        </p:txBody>
+      </p:sp>
+      <p:sp>
+        <p:nvSpPr>
+          <p:cNvPr id="8" name="TextBox 7"/>
+          <p:cNvSpPr txBox="1"/>
+          <p:nvPr/>
+        </p:nvSpPr>
+        <p:spPr>
+          <a:xfrm>
+            <a:off x="731520" y="6400800"/>
+            <a:ext cx="10058400" cy="365760"/>
+          </a:xfrm>
+          <a:prstGeom prst="rect">
+            <a:avLst/>
+          </a:prstGeom>
+          <a:noFill/>
+        </p:spPr>
+        <p:txBody>
+          <a:bodyPr wrap="square">
+            <a:spAutoFit/>
+          </a:bodyPr>
+          <a:lstStyle/>
+          <a:p>
+            <a:pPr algn="l">
+              <a:defRPr sz="1000" b="0">
+                <a:solidFill>
+                  <a:srgbClr val="999999"/>
+                </a:solidFill>
+                <a:latin typeface="Consolas"/>
+              </a:defRPr>
+            </a:pPr>
+            <a:r>
+              <a:t>© 2026 Martin J. Gallagher  |  GPL-3.0-or-later  |  doehelper.com</a:t>
             </a:r>
           </a:p>
         </p:txBody>
@@ -4700,7 +5253,7 @@
     <p:bg>
       <p:bgPr>
         <a:solidFill>
-          <a:srgbClr val="FFFFFF"/>
+          <a:srgbClr val="FAFAFA"/>
         </a:solidFill>
         <a:effectLst/>
       </p:bgPr>
@@ -4721,13 +5274,13 @@
         <p:spPr>
           <a:xfrm>
             <a:off x="0" y="0"/>
-            <a:ext cx="12191695" cy="54864"/>
+            <a:ext cx="12191695" cy="45720"/>
           </a:xfrm>
           <a:prstGeom prst="rect">
             <a:avLst/>
           </a:prstGeom>
           <a:solidFill>
-            <a:srgbClr val="007BFF"/>
+            <a:srgbClr val="5046E5"/>
           </a:solidFill>
           <a:ln>
             <a:noFill/>
@@ -4757,14 +5310,57 @@
       </p:sp>
       <p:sp>
         <p:nvSpPr>
-          <p:cNvPr id="3" name="TextBox 2"/>
+          <p:cNvPr id="3" name="Rectangle 2"/>
+          <p:cNvSpPr/>
+          <p:nvPr/>
+        </p:nvSpPr>
+        <p:spPr>
+          <a:xfrm>
+            <a:off x="548640" y="411480"/>
+            <a:ext cx="36576" cy="502920"/>
+          </a:xfrm>
+          <a:prstGeom prst="rect">
+            <a:avLst/>
+          </a:prstGeom>
+          <a:solidFill>
+            <a:srgbClr val="5046E5"/>
+          </a:solidFill>
+          <a:ln>
+            <a:noFill/>
+          </a:ln>
+        </p:spPr>
+        <p:style>
+          <a:lnRef idx="1">
+            <a:schemeClr val="accent1"/>
+          </a:lnRef>
+          <a:fillRef idx="3">
+            <a:schemeClr val="accent1"/>
+          </a:fillRef>
+          <a:effectRef idx="2">
+            <a:schemeClr val="accent1"/>
+          </a:effectRef>
+          <a:fontRef idx="minor">
+            <a:schemeClr val="lt1"/>
+          </a:fontRef>
+        </p:style>
+        <p:txBody>
+          <a:bodyPr rtlCol="0" anchor="ctr"/>
+          <a:lstStyle/>
+          <a:p>
+            <a:pPr algn="ctr"/>
+          </a:p>
+        </p:txBody>
+      </p:sp>
+      <p:sp>
+        <p:nvSpPr>
+          <p:cNvPr id="4" name="TextBox 3"/>
           <p:cNvSpPr txBox="1"/>
           <p:nvPr/>
         </p:nvSpPr>
         <p:spPr>
           <a:xfrm>
-            <a:off x="731520" y="365760"/>
-            <a:ext cx="10515600" cy="822960"/>
+            <a:off x="777240" y="365760"/>
+            <a:ext cx="10058400" cy="640080"/>
           </a:xfrm>
           <a:prstGeom prst="rect">
             <a:avLst/>
@@ -4777,12 +5373,12 @@
           </a:bodyPr>
           <a:lstStyle/>
           <a:p>
-            <a:pPr>
-              <a:defRPr sz="3200" b="1">
-                <a:solidFill>
-                  <a:srgbClr val="222222"/>
-                </a:solidFill>
-                <a:latin typeface="Calibri"/>
+            <a:pPr algn="l">
+              <a:defRPr sz="2800" b="1">
+                <a:solidFill>
+                  <a:srgbClr val="111111"/>
+                </a:solidFill>
+                <a:latin typeface="Inter"/>
               </a:defRPr>
             </a:pPr>
             <a:r>
@@ -4793,14 +5389,14 @@
       </p:sp>
       <p:sp>
         <p:nvSpPr>
-          <p:cNvPr id="4" name="TextBox 3"/>
+          <p:cNvPr id="5" name="TextBox 4"/>
           <p:cNvSpPr txBox="1"/>
           <p:nvPr/>
         </p:nvSpPr>
         <p:spPr>
           <a:xfrm>
-            <a:off x="914400" y="1463040"/>
-            <a:ext cx="10058400" cy="4754880"/>
+            <a:off x="822960" y="1188720"/>
+            <a:ext cx="10241280" cy="5120640"/>
           </a:xfrm>
           <a:prstGeom prst="rect">
             <a:avLst/>
@@ -4815,13 +5411,13 @@
           <a:p>
             <a:pPr>
               <a:spcAft>
-                <a:spcPts val="800"/>
+                <a:spcPts val="600"/>
               </a:spcAft>
-              <a:defRPr sz="2200" b="0">
-                <a:solidFill>
-                  <a:srgbClr val="222222"/>
-                </a:solidFill>
-                <a:latin typeface="Calibri"/>
+              <a:defRPr sz="1900">
+                <a:solidFill>
+                  <a:srgbClr val="333333"/>
+                </a:solidFill>
+                <a:latin typeface="Inter"/>
               </a:defRPr>
             </a:pPr>
             <a:r>
@@ -4831,13 +5427,13 @@
           <a:p>
             <a:pPr>
               <a:spcAft>
-                <a:spcPts val="800"/>
+                <a:spcPts val="600"/>
               </a:spcAft>
-              <a:defRPr sz="2200" b="0">
-                <a:solidFill>
-                  <a:srgbClr val="222222"/>
-                </a:solidFill>
-                <a:latin typeface="Calibri"/>
+              <a:defRPr sz="1900">
+                <a:solidFill>
+                  <a:srgbClr val="333333"/>
+                </a:solidFill>
+                <a:latin typeface="Inter"/>
               </a:defRPr>
             </a:pPr>
             <a:r>
@@ -4847,13 +5443,13 @@
           <a:p>
             <a:pPr>
               <a:spcAft>
-                <a:spcPts val="800"/>
+                <a:spcPts val="600"/>
               </a:spcAft>
-              <a:defRPr sz="2200" b="0">
-                <a:solidFill>
-                  <a:srgbClr val="222222"/>
-                </a:solidFill>
-                <a:latin typeface="Calibri"/>
+              <a:defRPr sz="1900">
+                <a:solidFill>
+                  <a:srgbClr val="333333"/>
+                </a:solidFill>
+                <a:latin typeface="Inter"/>
               </a:defRPr>
             </a:pPr>
             <a:r>
@@ -4863,13 +5459,13 @@
           <a:p>
             <a:pPr>
               <a:spcAft>
-                <a:spcPts val="800"/>
+                <a:spcPts val="600"/>
               </a:spcAft>
-              <a:defRPr sz="2200" b="0">
-                <a:solidFill>
-                  <a:srgbClr val="222222"/>
-                </a:solidFill>
-                <a:latin typeface="Calibri"/>
+              <a:defRPr sz="1900">
+                <a:solidFill>
+                  <a:srgbClr val="333333"/>
+                </a:solidFill>
+                <a:latin typeface="Inter"/>
               </a:defRPr>
             </a:pPr>
             <a:r>
@@ -4879,13 +5475,13 @@
           <a:p>
             <a:pPr>
               <a:spcAft>
-                <a:spcPts val="800"/>
+                <a:spcPts val="600"/>
               </a:spcAft>
-              <a:defRPr sz="2200" b="0">
-                <a:solidFill>
-                  <a:srgbClr val="222222"/>
-                </a:solidFill>
-                <a:latin typeface="Calibri"/>
+              <a:defRPr sz="1900">
+                <a:solidFill>
+                  <a:srgbClr val="333333"/>
+                </a:solidFill>
+                <a:latin typeface="Inter"/>
               </a:defRPr>
             </a:pPr>
             <a:r>
@@ -4895,17 +5491,53 @@
           <a:p>
             <a:pPr>
               <a:spcAft>
-                <a:spcPts val="800"/>
+                <a:spcPts val="600"/>
               </a:spcAft>
-              <a:defRPr sz="2200" b="0">
-                <a:solidFill>
-                  <a:srgbClr val="222222"/>
-                </a:solidFill>
-                <a:latin typeface="Calibri"/>
+              <a:defRPr sz="1900">
+                <a:solidFill>
+                  <a:srgbClr val="333333"/>
+                </a:solidFill>
+                <a:latin typeface="Inter"/>
               </a:defRPr>
             </a:pPr>
             <a:r>
               <a:t>Generate comprehensive HTML reports with doe report</a:t>
+            </a:r>
+          </a:p>
+        </p:txBody>
+      </p:sp>
+      <p:sp>
+        <p:nvSpPr>
+          <p:cNvPr id="6" name="TextBox 5"/>
+          <p:cNvSpPr txBox="1"/>
+          <p:nvPr/>
+        </p:nvSpPr>
+        <p:spPr>
+          <a:xfrm>
+            <a:off x="731520" y="6400800"/>
+            <a:ext cx="10058400" cy="365760"/>
+          </a:xfrm>
+          <a:prstGeom prst="rect">
+            <a:avLst/>
+          </a:prstGeom>
+          <a:noFill/>
+        </p:spPr>
+        <p:txBody>
+          <a:bodyPr wrap="square">
+            <a:spAutoFit/>
+          </a:bodyPr>
+          <a:lstStyle/>
+          <a:p>
+            <a:pPr algn="l">
+              <a:defRPr sz="1000" b="0">
+                <a:solidFill>
+                  <a:srgbClr val="999999"/>
+                </a:solidFill>
+                <a:latin typeface="Consolas"/>
+              </a:defRPr>
+            </a:pPr>
+            <a:r>
+              <a:t>© 2026 Martin J. Gallagher  |  GPL-3.0-or-later  |  doehelper.com</a:t>
             </a:r>
           </a:p>
         </p:txBody>
@@ -4924,7 +5556,7 @@
     <p:bg>
       <p:bgPr>
         <a:solidFill>
-          <a:srgbClr val="FFFFFF"/>
+          <a:srgbClr val="FAFAFA"/>
         </a:solidFill>
         <a:effectLst/>
       </p:bgPr>
@@ -4945,13 +5577,13 @@
         <p:spPr>
           <a:xfrm>
             <a:off x="0" y="0"/>
-            <a:ext cx="12191695" cy="54864"/>
+            <a:ext cx="12191695" cy="45720"/>
           </a:xfrm>
           <a:prstGeom prst="rect">
             <a:avLst/>
           </a:prstGeom>
           <a:solidFill>
-            <a:srgbClr val="007BFF"/>
+            <a:srgbClr val="5046E5"/>
           </a:solidFill>
           <a:ln>
             <a:noFill/>
@@ -4981,14 +5613,57 @@
       </p:sp>
       <p:sp>
         <p:nvSpPr>
-          <p:cNvPr id="3" name="TextBox 2"/>
+          <p:cNvPr id="3" name="Rectangle 2"/>
+          <p:cNvSpPr/>
+          <p:nvPr/>
+        </p:nvSpPr>
+        <p:spPr>
+          <a:xfrm>
+            <a:off x="548640" y="411480"/>
+            <a:ext cx="36576" cy="502920"/>
+          </a:xfrm>
+          <a:prstGeom prst="rect">
+            <a:avLst/>
+          </a:prstGeom>
+          <a:solidFill>
+            <a:srgbClr val="5046E5"/>
+          </a:solidFill>
+          <a:ln>
+            <a:noFill/>
+          </a:ln>
+        </p:spPr>
+        <p:style>
+          <a:lnRef idx="1">
+            <a:schemeClr val="accent1"/>
+          </a:lnRef>
+          <a:fillRef idx="3">
+            <a:schemeClr val="accent1"/>
+          </a:fillRef>
+          <a:effectRef idx="2">
+            <a:schemeClr val="accent1"/>
+          </a:effectRef>
+          <a:fontRef idx="minor">
+            <a:schemeClr val="lt1"/>
+          </a:fontRef>
+        </p:style>
+        <p:txBody>
+          <a:bodyPr rtlCol="0" anchor="ctr"/>
+          <a:lstStyle/>
+          <a:p>
+            <a:pPr algn="ctr"/>
+          </a:p>
+        </p:txBody>
+      </p:sp>
+      <p:sp>
+        <p:nvSpPr>
+          <p:cNvPr id="4" name="TextBox 3"/>
           <p:cNvSpPr txBox="1"/>
           <p:nvPr/>
         </p:nvSpPr>
         <p:spPr>
           <a:xfrm>
-            <a:off x="731520" y="365760"/>
-            <a:ext cx="10515600" cy="822960"/>
+            <a:off x="777240" y="365760"/>
+            <a:ext cx="10058400" cy="640080"/>
           </a:xfrm>
           <a:prstGeom prst="rect">
             <a:avLst/>
@@ -5001,12 +5676,12 @@
           </a:bodyPr>
           <a:lstStyle/>
           <a:p>
-            <a:pPr>
-              <a:defRPr sz="3200" b="1">
-                <a:solidFill>
-                  <a:srgbClr val="222222"/>
-                </a:solidFill>
-                <a:latin typeface="Calibri"/>
+            <a:pPr algn="l">
+              <a:defRPr sz="2800" b="1">
+                <a:solidFill>
+                  <a:srgbClr val="111111"/>
+                </a:solidFill>
+                <a:latin typeface="Inter"/>
               </a:defRPr>
             </a:pPr>
             <a:r>
@@ -5017,14 +5692,14 @@
       </p:sp>
       <p:sp>
         <p:nvSpPr>
-          <p:cNvPr id="4" name="TextBox 3"/>
+          <p:cNvPr id="5" name="TextBox 4"/>
           <p:cNvSpPr txBox="1"/>
           <p:nvPr/>
         </p:nvSpPr>
         <p:spPr>
           <a:xfrm>
-            <a:off x="914400" y="1463040"/>
-            <a:ext cx="10058400" cy="4754880"/>
+            <a:off x="822960" y="1188720"/>
+            <a:ext cx="10241280" cy="5120640"/>
           </a:xfrm>
           <a:prstGeom prst="rect">
             <a:avLst/>
@@ -5039,13 +5714,13 @@
           <a:p>
             <a:pPr>
               <a:spcAft>
-                <a:spcPts val="800"/>
+                <a:spcPts val="600"/>
               </a:spcAft>
-              <a:defRPr sz="2200" b="0">
-                <a:solidFill>
-                  <a:srgbClr val="222222"/>
-                </a:solidFill>
-                <a:latin typeface="Calibri"/>
+              <a:defRPr sz="1900">
+                <a:solidFill>
+                  <a:srgbClr val="333333"/>
+                </a:solidFill>
+                <a:latin typeface="Inter"/>
               </a:defRPr>
             </a:pPr>
             <a:r>
@@ -5055,13 +5730,13 @@
           <a:p>
             <a:pPr lvl="1">
               <a:spcAft>
-                <a:spcPts val="800"/>
+                <a:spcPts val="600"/>
               </a:spcAft>
-              <a:defRPr sz="1900">
-                <a:solidFill>
-                  <a:srgbClr val="222222"/>
-                </a:solidFill>
-                <a:latin typeface="Calibri"/>
+              <a:defRPr sz="1700">
+                <a:solidFill>
+                  <a:srgbClr val="666666"/>
+                </a:solidFill>
+                <a:latin typeface="Inter"/>
               </a:defRPr>
             </a:pPr>
             <a:r>
@@ -5071,29 +5746,29 @@
           <a:p>
             <a:pPr lvl="1">
               <a:spcAft>
-                <a:spcPts val="800"/>
+                <a:spcPts val="600"/>
               </a:spcAft>
-              <a:defRPr sz="1900">
-                <a:solidFill>
-                  <a:srgbClr val="222222"/>
-                </a:solidFill>
-                <a:latin typeface="Calibri"/>
-              </a:defRPr>
-            </a:pPr>
-            <a:r>
-              <a:t>Effect estimates with confidence intervals</a:t>
+              <a:defRPr sz="1700">
+                <a:solidFill>
+                  <a:srgbClr val="666666"/>
+                </a:solidFill>
+                <a:latin typeface="Inter"/>
+              </a:defRPr>
+            </a:pPr>
+            <a:r>
+              <a:t>Effect estimates with 95% confidence intervals</a:t>
             </a:r>
           </a:p>
           <a:p>
             <a:pPr lvl="1">
               <a:spcAft>
-                <a:spcPts val="800"/>
+                <a:spcPts val="600"/>
               </a:spcAft>
-              <a:defRPr sz="1900">
-                <a:solidFill>
-                  <a:srgbClr val="222222"/>
-                </a:solidFill>
-                <a:latin typeface="Calibri"/>
+              <a:defRPr sz="1700">
+                <a:solidFill>
+                  <a:srgbClr val="666666"/>
+                </a:solidFill>
+                <a:latin typeface="Inter"/>
               </a:defRPr>
             </a:pPr>
             <a:r>
@@ -5103,81 +5778,101 @@
           <a:p>
             <a:pPr lvl="1">
               <a:spcAft>
-                <a:spcPts val="800"/>
+                <a:spcPts val="600"/>
               </a:spcAft>
-              <a:defRPr sz="1900">
-                <a:solidFill>
-                  <a:srgbClr val="222222"/>
-                </a:solidFill>
-                <a:latin typeface="Calibri"/>
-              </a:defRPr>
-            </a:pPr>
-            <a:r>
-              <a:t>Main effects plots</a:t>
+              <a:defRPr sz="1700">
+                <a:solidFill>
+                  <a:srgbClr val="666666"/>
+                </a:solidFill>
+                <a:latin typeface="Inter"/>
+              </a:defRPr>
+            </a:pPr>
+            <a:r>
+              <a:t>Main effects plots and interaction plots</a:t>
             </a:r>
           </a:p>
           <a:p>
             <a:pPr lvl="1">
               <a:spcAft>
-                <a:spcPts val="800"/>
+                <a:spcPts val="600"/>
               </a:spcAft>
-              <a:defRPr sz="1900">
-                <a:solidFill>
-                  <a:srgbClr val="222222"/>
-                </a:solidFill>
-                <a:latin typeface="Calibri"/>
-              </a:defRPr>
-            </a:pPr>
-            <a:r>
-              <a:t>Interaction plots</a:t>
+              <a:defRPr sz="1700">
+                <a:solidFill>
+                  <a:srgbClr val="666666"/>
+                </a:solidFill>
+                <a:latin typeface="Inter"/>
+              </a:defRPr>
+            </a:pPr>
+            <a:r>
+              <a:t>Normal probability plot of effects</a:t>
             </a:r>
           </a:p>
           <a:p>
             <a:pPr lvl="1">
               <a:spcAft>
-                <a:spcPts val="800"/>
+                <a:spcPts val="600"/>
               </a:spcAft>
-              <a:defRPr sz="1900">
-                <a:solidFill>
-                  <a:srgbClr val="222222"/>
-                </a:solidFill>
-                <a:latin typeface="Calibri"/>
-              </a:defRPr>
-            </a:pPr>
-            <a:r>
-              <a:t>Normal probability plot of effects</a:t>
+              <a:defRPr sz="1700">
+                <a:solidFill>
+                  <a:srgbClr val="666666"/>
+                </a:solidFill>
+                <a:latin typeface="Inter"/>
+              </a:defRPr>
+            </a:pPr>
+            <a:r>
+              <a:t>Residual diagnostics (4-panel plot)</a:t>
             </a:r>
           </a:p>
           <a:p>
             <a:pPr lvl="1">
               <a:spcAft>
-                <a:spcPts val="800"/>
+                <a:spcPts val="600"/>
               </a:spcAft>
-              <a:defRPr sz="1900">
-                <a:solidFill>
-                  <a:srgbClr val="222222"/>
-                </a:solidFill>
-                <a:latin typeface="Calibri"/>
-              </a:defRPr>
-            </a:pPr>
-            <a:r>
-              <a:t>Residual diagnostics (4-panel plot)</a:t>
-            </a:r>
-          </a:p>
-          <a:p>
-            <a:pPr lvl="1">
-              <a:spcAft>
-                <a:spcPts val="800"/>
-              </a:spcAft>
-              <a:defRPr sz="1900">
-                <a:solidFill>
-                  <a:srgbClr val="222222"/>
-                </a:solidFill>
-                <a:latin typeface="Calibri"/>
-              </a:defRPr>
-            </a:pPr>
-            <a:r>
-              <a:t>Model summary (R-squared, adjusted R-squared)</a:t>
+              <a:defRPr sz="1700">
+                <a:solidFill>
+                  <a:srgbClr val="666666"/>
+                </a:solidFill>
+                <a:latin typeface="Inter"/>
+              </a:defRPr>
+            </a:pPr>
+            <a:r>
+              <a:t>Model summary (R², adjusted R², predicted R²)</a:t>
+            </a:r>
+          </a:p>
+        </p:txBody>
+      </p:sp>
+      <p:sp>
+        <p:nvSpPr>
+          <p:cNvPr id="6" name="TextBox 5"/>
+          <p:cNvSpPr txBox="1"/>
+          <p:nvPr/>
+        </p:nvSpPr>
+        <p:spPr>
+          <a:xfrm>
+            <a:off x="731520" y="6400800"/>
+            <a:ext cx="10058400" cy="365760"/>
+          </a:xfrm>
+          <a:prstGeom prst="rect">
+            <a:avLst/>
+          </a:prstGeom>
+          <a:noFill/>
+        </p:spPr>
+        <p:txBody>
+          <a:bodyPr wrap="square">
+            <a:spAutoFit/>
+          </a:bodyPr>
+          <a:lstStyle/>
+          <a:p>
+            <a:pPr algn="l">
+              <a:defRPr sz="1000" b="0">
+                <a:solidFill>
+                  <a:srgbClr val="999999"/>
+                </a:solidFill>
+                <a:latin typeface="Consolas"/>
+              </a:defRPr>
+            </a:pPr>
+            <a:r>
+              <a:t>© 2026 Martin J. Gallagher  |  GPL-3.0-or-later  |  doehelper.com</a:t>
             </a:r>
           </a:p>
         </p:txBody>
@@ -5196,7 +5891,7 @@
     <p:bg>
       <p:bgPr>
         <a:solidFill>
-          <a:srgbClr val="FFFFFF"/>
+          <a:srgbClr val="FAFAFA"/>
         </a:solidFill>
         <a:effectLst/>
       </p:bgPr>
@@ -5217,13 +5912,13 @@
         <p:spPr>
           <a:xfrm>
             <a:off x="0" y="0"/>
-            <a:ext cx="12191695" cy="54864"/>
+            <a:ext cx="12191695" cy="45720"/>
           </a:xfrm>
           <a:prstGeom prst="rect">
             <a:avLst/>
           </a:prstGeom>
           <a:solidFill>
-            <a:srgbClr val="007BFF"/>
+            <a:srgbClr val="5046E5"/>
           </a:solidFill>
           <a:ln>
             <a:noFill/>
@@ -5253,14 +5948,57 @@
       </p:sp>
       <p:sp>
         <p:nvSpPr>
-          <p:cNvPr id="3" name="TextBox 2"/>
+          <p:cNvPr id="3" name="Rectangle 2"/>
+          <p:cNvSpPr/>
+          <p:nvPr/>
+        </p:nvSpPr>
+        <p:spPr>
+          <a:xfrm>
+            <a:off x="548640" y="411480"/>
+            <a:ext cx="36576" cy="502920"/>
+          </a:xfrm>
+          <a:prstGeom prst="rect">
+            <a:avLst/>
+          </a:prstGeom>
+          <a:solidFill>
+            <a:srgbClr val="5046E5"/>
+          </a:solidFill>
+          <a:ln>
+            <a:noFill/>
+          </a:ln>
+        </p:spPr>
+        <p:style>
+          <a:lnRef idx="1">
+            <a:schemeClr val="accent1"/>
+          </a:lnRef>
+          <a:fillRef idx="3">
+            <a:schemeClr val="accent1"/>
+          </a:fillRef>
+          <a:effectRef idx="2">
+            <a:schemeClr val="accent1"/>
+          </a:effectRef>
+          <a:fontRef idx="minor">
+            <a:schemeClr val="lt1"/>
+          </a:fontRef>
+        </p:style>
+        <p:txBody>
+          <a:bodyPr rtlCol="0" anchor="ctr"/>
+          <a:lstStyle/>
+          <a:p>
+            <a:pPr algn="ctr"/>
+          </a:p>
+        </p:txBody>
+      </p:sp>
+      <p:sp>
+        <p:nvSpPr>
+          <p:cNvPr id="4" name="TextBox 3"/>
           <p:cNvSpPr txBox="1"/>
           <p:nvPr/>
         </p:nvSpPr>
         <p:spPr>
           <a:xfrm>
-            <a:off x="731520" y="365760"/>
-            <a:ext cx="10515600" cy="822960"/>
+            <a:off x="777240" y="365760"/>
+            <a:ext cx="10058400" cy="640080"/>
           </a:xfrm>
           <a:prstGeom prst="rect">
             <a:avLst/>
@@ -5273,12 +6011,12 @@
           </a:bodyPr>
           <a:lstStyle/>
           <a:p>
-            <a:pPr>
-              <a:defRPr sz="3200" b="1">
-                <a:solidFill>
-                  <a:srgbClr val="222222"/>
-                </a:solidFill>
-                <a:latin typeface="Calibri"/>
+            <a:pPr algn="l">
+              <a:defRPr sz="2800" b="1">
+                <a:solidFill>
+                  <a:srgbClr val="111111"/>
+                </a:solidFill>
+                <a:latin typeface="Inter"/>
               </a:defRPr>
             </a:pPr>
             <a:r>
@@ -5289,14 +6027,14 @@
       </p:sp>
       <p:sp>
         <p:nvSpPr>
-          <p:cNvPr id="4" name="TextBox 3"/>
+          <p:cNvPr id="5" name="TextBox 4"/>
           <p:cNvSpPr txBox="1"/>
           <p:nvPr/>
         </p:nvSpPr>
         <p:spPr>
           <a:xfrm>
-            <a:off x="914400" y="1463040"/>
-            <a:ext cx="10058400" cy="4754880"/>
+            <a:off x="822960" y="1188720"/>
+            <a:ext cx="10241280" cy="5120640"/>
           </a:xfrm>
           <a:prstGeom prst="rect">
             <a:avLst/>
@@ -5311,129 +6049,149 @@
           <a:p>
             <a:pPr>
               <a:spcAft>
-                <a:spcPts val="800"/>
+                <a:spcPts val="600"/>
               </a:spcAft>
-              <a:defRPr sz="2200" b="0">
-                <a:solidFill>
-                  <a:srgbClr val="222222"/>
-                </a:solidFill>
-                <a:latin typeface="Calibri"/>
-              </a:defRPr>
-            </a:pPr>
-            <a:r>
-              <a:t>Source: name of the factor, interaction, or error term</a:t>
+              <a:defRPr sz="1900">
+                <a:solidFill>
+                  <a:srgbClr val="333333"/>
+                </a:solidFill>
+                <a:latin typeface="Inter"/>
+              </a:defRPr>
+            </a:pPr>
+            <a:r>
+              <a:t>SS (Sum of Squares) — total variability explained</a:t>
+            </a:r>
+          </a:p>
+          <a:p>
+            <a:pPr lvl="1">
+              <a:spcAft>
+                <a:spcPts val="600"/>
+              </a:spcAft>
+              <a:defRPr sz="1700">
+                <a:solidFill>
+                  <a:srgbClr val="666666"/>
+                </a:solidFill>
+                <a:latin typeface="Inter"/>
+              </a:defRPr>
+            </a:pPr>
+            <a:r>
+              <a:t>% Contribution = SS_source / SS_total × 100</a:t>
             </a:r>
           </a:p>
           <a:p>
             <a:pPr>
               <a:spcAft>
-                <a:spcPts val="800"/>
+                <a:spcPts val="600"/>
               </a:spcAft>
-              <a:defRPr sz="2200" b="0">
-                <a:solidFill>
-                  <a:srgbClr val="222222"/>
-                </a:solidFill>
-                <a:latin typeface="Calibri"/>
-              </a:defRPr>
-            </a:pPr>
-            <a:r>
-              <a:t>Sum of Squares (SS): total variability explained by this source</a:t>
+              <a:defRPr sz="1900">
+                <a:solidFill>
+                  <a:srgbClr val="333333"/>
+                </a:solidFill>
+                <a:latin typeface="Inter"/>
+              </a:defRPr>
+            </a:pPr>
+            <a:r>
+              <a:t>DF (Degrees of Freedom) — parameters used</a:t>
+            </a:r>
+          </a:p>
+          <a:p>
+            <a:pPr>
+              <a:spcAft>
+                <a:spcPts val="600"/>
+              </a:spcAft>
+              <a:defRPr sz="1900">
+                <a:solidFill>
+                  <a:srgbClr val="333333"/>
+                </a:solidFill>
+                <a:latin typeface="Inter"/>
+              </a:defRPr>
+            </a:pPr>
+            <a:r>
+              <a:t>MS (Mean Square) — SS / DF</a:t>
+            </a:r>
+          </a:p>
+          <a:p>
+            <a:pPr>
+              <a:spcAft>
+                <a:spcPts val="600"/>
+              </a:spcAft>
+              <a:defRPr sz="1900">
+                <a:solidFill>
+                  <a:srgbClr val="333333"/>
+                </a:solidFill>
+                <a:latin typeface="Inter"/>
+              </a:defRPr>
+            </a:pPr>
+            <a:r>
+              <a:t>F-value — MS_source / MS_error (signal-to-noise ratio)</a:t>
+            </a:r>
+          </a:p>
+          <a:p>
+            <a:pPr>
+              <a:spcAft>
+                <a:spcPts val="600"/>
+              </a:spcAft>
+              <a:defRPr sz="1900">
+                <a:solidFill>
+                  <a:srgbClr val="333333"/>
+                </a:solidFill>
+                <a:latin typeface="Inter"/>
+              </a:defRPr>
+            </a:pPr>
+            <a:r>
+              <a:t>p-value — probability of seeing this F by chance</a:t>
             </a:r>
           </a:p>
           <a:p>
             <a:pPr lvl="1">
               <a:spcAft>
-                <a:spcPts val="800"/>
+                <a:spcPts val="600"/>
               </a:spcAft>
-              <a:defRPr sz="1900">
-                <a:solidFill>
-                  <a:srgbClr val="222222"/>
-                </a:solidFill>
-                <a:latin typeface="Calibri"/>
-              </a:defRPr>
-            </a:pPr>
-            <a:r>
-              <a:t>% Contribution = SS_source / SS_total x 100</a:t>
-            </a:r>
-          </a:p>
-          <a:p>
-            <a:pPr>
-              <a:spcAft>
-                <a:spcPts val="800"/>
-              </a:spcAft>
-              <a:defRPr sz="2200" b="0">
-                <a:solidFill>
-                  <a:srgbClr val="222222"/>
-                </a:solidFill>
-                <a:latin typeface="Calibri"/>
-              </a:defRPr>
-            </a:pPr>
-            <a:r>
-              <a:t>Degrees of Freedom (DF): parameters used</a:t>
-            </a:r>
-          </a:p>
-          <a:p>
-            <a:pPr>
-              <a:spcAft>
-                <a:spcPts val="800"/>
-              </a:spcAft>
-              <a:defRPr sz="2200" b="0">
-                <a:solidFill>
-                  <a:srgbClr val="222222"/>
-                </a:solidFill>
-                <a:latin typeface="Calibri"/>
-              </a:defRPr>
-            </a:pPr>
-            <a:r>
-              <a:t>Mean Square (MS): SS / DF</a:t>
-            </a:r>
-          </a:p>
-          <a:p>
-            <a:pPr>
-              <a:spcAft>
-                <a:spcPts val="800"/>
-              </a:spcAft>
-              <a:defRPr sz="2200" b="0">
-                <a:solidFill>
-                  <a:srgbClr val="222222"/>
-                </a:solidFill>
-                <a:latin typeface="Calibri"/>
-              </a:defRPr>
-            </a:pPr>
-            <a:r>
-              <a:t>F-value: MS_source / MS_error (signal-to-noise ratio)</a:t>
-            </a:r>
-          </a:p>
-          <a:p>
-            <a:pPr>
-              <a:spcAft>
-                <a:spcPts val="800"/>
-              </a:spcAft>
-              <a:defRPr sz="2200" b="0">
-                <a:solidFill>
-                  <a:srgbClr val="222222"/>
-                </a:solidFill>
-                <a:latin typeface="Calibri"/>
-              </a:defRPr>
-            </a:pPr>
-            <a:r>
-              <a:t>p-value: probability of seeing this F by chance</a:t>
-            </a:r>
-          </a:p>
-          <a:p>
-            <a:pPr lvl="1">
-              <a:spcAft>
-                <a:spcPts val="800"/>
-              </a:spcAft>
-              <a:defRPr sz="1900">
-                <a:solidFill>
-                  <a:srgbClr val="222222"/>
-                </a:solidFill>
-                <a:latin typeface="Calibri"/>
-              </a:defRPr>
-            </a:pPr>
-            <a:r>
-              <a:t>p &lt; 0.05: significant | p &lt; 0.01: highly significant</a:t>
+              <a:defRPr sz="1700">
+                <a:solidFill>
+                  <a:srgbClr val="666666"/>
+                </a:solidFill>
+                <a:latin typeface="Inter"/>
+              </a:defRPr>
+            </a:pPr>
+            <a:r>
+              <a:t>p &lt; 0.05: significant   |   p &lt; 0.01: highly significant</a:t>
+            </a:r>
+          </a:p>
+        </p:txBody>
+      </p:sp>
+      <p:sp>
+        <p:nvSpPr>
+          <p:cNvPr id="6" name="TextBox 5"/>
+          <p:cNvSpPr txBox="1"/>
+          <p:nvPr/>
+        </p:nvSpPr>
+        <p:spPr>
+          <a:xfrm>
+            <a:off x="731520" y="6400800"/>
+            <a:ext cx="10058400" cy="365760"/>
+          </a:xfrm>
+          <a:prstGeom prst="rect">
+            <a:avLst/>
+          </a:prstGeom>
+          <a:noFill/>
+        </p:spPr>
+        <p:txBody>
+          <a:bodyPr wrap="square">
+            <a:spAutoFit/>
+          </a:bodyPr>
+          <a:lstStyle/>
+          <a:p>
+            <a:pPr algn="l">
+              <a:defRPr sz="1000" b="0">
+                <a:solidFill>
+                  <a:srgbClr val="999999"/>
+                </a:solidFill>
+                <a:latin typeface="Consolas"/>
+              </a:defRPr>
+            </a:pPr>
+            <a:r>
+              <a:t>© 2026 Martin J. Gallagher  |  GPL-3.0-or-later  |  doehelper.com</a:t>
             </a:r>
           </a:p>
         </p:txBody>
@@ -5452,7 +6210,7 @@
     <p:bg>
       <p:bgPr>
         <a:solidFill>
-          <a:srgbClr val="FFFFFF"/>
+          <a:srgbClr val="FAFAFA"/>
         </a:solidFill>
         <a:effectLst/>
       </p:bgPr>
@@ -5473,13 +6231,13 @@
         <p:spPr>
           <a:xfrm>
             <a:off x="0" y="0"/>
-            <a:ext cx="12191695" cy="54864"/>
+            <a:ext cx="12191695" cy="45720"/>
           </a:xfrm>
           <a:prstGeom prst="rect">
             <a:avLst/>
           </a:prstGeom>
           <a:solidFill>
-            <a:srgbClr val="007BFF"/>
+            <a:srgbClr val="5046E5"/>
           </a:solidFill>
           <a:ln>
             <a:noFill/>
@@ -5509,14 +6267,57 @@
       </p:sp>
       <p:sp>
         <p:nvSpPr>
-          <p:cNvPr id="3" name="TextBox 2"/>
+          <p:cNvPr id="3" name="Rectangle 2"/>
+          <p:cNvSpPr/>
+          <p:nvPr/>
+        </p:nvSpPr>
+        <p:spPr>
+          <a:xfrm>
+            <a:off x="548640" y="411480"/>
+            <a:ext cx="36576" cy="502920"/>
+          </a:xfrm>
+          <a:prstGeom prst="rect">
+            <a:avLst/>
+          </a:prstGeom>
+          <a:solidFill>
+            <a:srgbClr val="5046E5"/>
+          </a:solidFill>
+          <a:ln>
+            <a:noFill/>
+          </a:ln>
+        </p:spPr>
+        <p:style>
+          <a:lnRef idx="1">
+            <a:schemeClr val="accent1"/>
+          </a:lnRef>
+          <a:fillRef idx="3">
+            <a:schemeClr val="accent1"/>
+          </a:fillRef>
+          <a:effectRef idx="2">
+            <a:schemeClr val="accent1"/>
+          </a:effectRef>
+          <a:fontRef idx="minor">
+            <a:schemeClr val="lt1"/>
+          </a:fontRef>
+        </p:style>
+        <p:txBody>
+          <a:bodyPr rtlCol="0" anchor="ctr"/>
+          <a:lstStyle/>
+          <a:p>
+            <a:pPr algn="ctr"/>
+          </a:p>
+        </p:txBody>
+      </p:sp>
+      <p:sp>
+        <p:nvSpPr>
+          <p:cNvPr id="4" name="TextBox 3"/>
           <p:cNvSpPr txBox="1"/>
           <p:nvPr/>
         </p:nvSpPr>
         <p:spPr>
           <a:xfrm>
-            <a:off x="731520" y="365760"/>
-            <a:ext cx="10515600" cy="822960"/>
+            <a:off x="777240" y="365760"/>
+            <a:ext cx="10058400" cy="640080"/>
           </a:xfrm>
           <a:prstGeom prst="rect">
             <a:avLst/>
@@ -5529,30 +6330,116 @@
           </a:bodyPr>
           <a:lstStyle/>
           <a:p>
-            <a:pPr>
-              <a:defRPr sz="3200" b="1">
-                <a:solidFill>
-                  <a:srgbClr val="222222"/>
-                </a:solidFill>
-                <a:latin typeface="Calibri"/>
-              </a:defRPr>
-            </a:pPr>
-            <a:r>
-              <a:t>Pareto Chart of Effects</a:t>
-            </a:r>
-          </a:p>
-        </p:txBody>
-      </p:sp>
-      <p:sp>
-        <p:nvSpPr>
-          <p:cNvPr id="4" name="TextBox 3"/>
+            <a:pPr algn="l">
+              <a:defRPr sz="2800" b="1">
+                <a:solidFill>
+                  <a:srgbClr val="111111"/>
+                </a:solidFill>
+                <a:latin typeface="Inter"/>
+              </a:defRPr>
+            </a:pPr>
+            <a:r>
+              <a:t>Main Effects &amp; Interaction Plots</a:t>
+            </a:r>
+          </a:p>
+        </p:txBody>
+      </p:sp>
+      <p:sp>
+        <p:nvSpPr>
+          <p:cNvPr id="5" name="Rounded Rectangle 4"/>
+          <p:cNvSpPr/>
+          <p:nvPr/>
+        </p:nvSpPr>
+        <p:spPr>
+          <a:xfrm>
+            <a:off x="548640" y="1188720"/>
+            <a:ext cx="5303520" cy="4937760"/>
+          </a:xfrm>
+          <a:prstGeom prst="roundRect">
+            <a:avLst/>
+          </a:prstGeom>
+          <a:solidFill>
+            <a:srgbClr val="F0FDF4"/>
+          </a:solidFill>
+          <a:ln>
+            <a:noFill/>
+          </a:ln>
+        </p:spPr>
+        <p:style>
+          <a:lnRef idx="1">
+            <a:schemeClr val="accent1"/>
+          </a:lnRef>
+          <a:fillRef idx="3">
+            <a:schemeClr val="accent1"/>
+          </a:fillRef>
+          <a:effectRef idx="2">
+            <a:schemeClr val="accent1"/>
+          </a:effectRef>
+          <a:fontRef idx="minor">
+            <a:schemeClr val="lt1"/>
+          </a:fontRef>
+        </p:style>
+        <p:txBody>
+          <a:bodyPr rtlCol="0" anchor="ctr"/>
+          <a:lstStyle/>
+          <a:p>
+            <a:pPr algn="ctr"/>
+          </a:p>
+        </p:txBody>
+      </p:sp>
+      <p:sp>
+        <p:nvSpPr>
+          <p:cNvPr id="6" name="Rectangle 5"/>
+          <p:cNvSpPr/>
+          <p:nvPr/>
+        </p:nvSpPr>
+        <p:spPr>
+          <a:xfrm>
+            <a:off x="548640" y="1188720"/>
+            <a:ext cx="36576" cy="4937760"/>
+          </a:xfrm>
+          <a:prstGeom prst="rect">
+            <a:avLst/>
+          </a:prstGeom>
+          <a:solidFill>
+            <a:srgbClr val="16A34A"/>
+          </a:solidFill>
+          <a:ln>
+            <a:noFill/>
+          </a:ln>
+        </p:spPr>
+        <p:style>
+          <a:lnRef idx="1">
+            <a:schemeClr val="accent1"/>
+          </a:lnRef>
+          <a:fillRef idx="3">
+            <a:schemeClr val="accent1"/>
+          </a:fillRef>
+          <a:effectRef idx="2">
+            <a:schemeClr val="accent1"/>
+          </a:effectRef>
+          <a:fontRef idx="minor">
+            <a:schemeClr val="lt1"/>
+          </a:fontRef>
+        </p:style>
+        <p:txBody>
+          <a:bodyPr rtlCol="0" anchor="ctr"/>
+          <a:lstStyle/>
+          <a:p>
+            <a:pPr algn="ctr"/>
+          </a:p>
+        </p:txBody>
+      </p:sp>
+      <p:sp>
+        <p:nvSpPr>
+          <p:cNvPr id="7" name="TextBox 6"/>
           <p:cNvSpPr txBox="1"/>
           <p:nvPr/>
         </p:nvSpPr>
         <p:spPr>
           <a:xfrm>
-            <a:off x="914400" y="1463040"/>
-            <a:ext cx="10058400" cy="4754880"/>
+            <a:off x="822960" y="1325880"/>
+            <a:ext cx="4754880" cy="365760"/>
           </a:xfrm>
           <a:prstGeom prst="rect">
             <a:avLst/>
@@ -5565,115 +6452,380 @@
           </a:bodyPr>
           <a:lstStyle/>
           <a:p>
+            <a:pPr algn="l">
+              <a:defRPr sz="1600" b="1">
+                <a:solidFill>
+                  <a:srgbClr val="16A34A"/>
+                </a:solidFill>
+                <a:latin typeface="Consolas"/>
+              </a:defRPr>
+            </a:pPr>
+            <a:r>
+              <a:t>MAIN EFFECTS</a:t>
+            </a:r>
+          </a:p>
+        </p:txBody>
+      </p:sp>
+      <p:sp>
+        <p:nvSpPr>
+          <p:cNvPr id="8" name="TextBox 7"/>
+          <p:cNvSpPr txBox="1"/>
+          <p:nvPr/>
+        </p:nvSpPr>
+        <p:spPr>
+          <a:xfrm>
+            <a:off x="822960" y="1737360"/>
+            <a:ext cx="4754880" cy="4114800"/>
+          </a:xfrm>
+          <a:prstGeom prst="rect">
+            <a:avLst/>
+          </a:prstGeom>
+          <a:noFill/>
+        </p:spPr>
+        <p:txBody>
+          <a:bodyPr wrap="square">
+            <a:spAutoFit/>
+          </a:bodyPr>
+          <a:lstStyle/>
+          <a:p>
             <a:pPr>
               <a:spcAft>
-                <a:spcPts val="800"/>
+                <a:spcPts val="500"/>
               </a:spcAft>
-              <a:defRPr sz="2200" b="0">
-                <a:solidFill>
-                  <a:srgbClr val="222222"/>
-                </a:solidFill>
-                <a:latin typeface="Calibri"/>
-              </a:defRPr>
-            </a:pPr>
-            <a:r>
-              <a:t>Horizontal bar chart, absolute effects sorted large to small</a:t>
+              <a:defRPr sz="1700">
+                <a:solidFill>
+                  <a:srgbClr val="333333"/>
+                </a:solidFill>
+                <a:latin typeface="Inter"/>
+              </a:defRPr>
+            </a:pPr>
+            <a:r>
+              <a:t>Main Effects Plot:</a:t>
             </a:r>
           </a:p>
           <a:p>
             <a:pPr>
               <a:spcAft>
-                <a:spcPts val="800"/>
+                <a:spcPts val="500"/>
               </a:spcAft>
-              <a:defRPr sz="2200" b="0">
-                <a:solidFill>
-                  <a:srgbClr val="222222"/>
-                </a:solidFill>
-                <a:latin typeface="Calibri"/>
-              </a:defRPr>
-            </a:pPr>
-            <a:r>
-              <a:t>Dashed line = significance threshold</a:t>
-            </a:r>
-          </a:p>
-          <a:p>
-            <a:pPr lvl="1">
-              <a:spcAft>
-                <a:spcPts val="800"/>
-              </a:spcAft>
-              <a:defRPr sz="1900">
-                <a:solidFill>
-                  <a:srgbClr val="222222"/>
-                </a:solidFill>
-                <a:latin typeface="Calibri"/>
-              </a:defRPr>
-            </a:pPr>
-            <a:r>
-              <a:t>For replicated designs: based on pooled error estimate</a:t>
-            </a:r>
-          </a:p>
-          <a:p>
-            <a:pPr lvl="1">
-              <a:spcAft>
-                <a:spcPts val="800"/>
-              </a:spcAft>
-              <a:defRPr sz="1900">
-                <a:solidFill>
-                  <a:srgbClr val="222222"/>
-                </a:solidFill>
-                <a:latin typeface="Calibri"/>
-              </a:defRPr>
-            </a:pPr>
-            <a:r>
-              <a:t>For unreplicated: uses Lenth's pseudo-standard-error</a:t>
+              <a:defRPr sz="1700">
+                <a:solidFill>
+                  <a:srgbClr val="333333"/>
+                </a:solidFill>
+                <a:latin typeface="Inter"/>
+              </a:defRPr>
+            </a:pPr>
+            <a:r>
+              <a:t>Shows average response at each level</a:t>
             </a:r>
           </a:p>
           <a:p>
             <a:pPr>
               <a:spcAft>
-                <a:spcPts val="800"/>
+                <a:spcPts val="500"/>
               </a:spcAft>
-              <a:defRPr sz="2200" b="0">
-                <a:solidFill>
-                  <a:srgbClr val="222222"/>
-                </a:solidFill>
-                <a:latin typeface="Calibri"/>
-              </a:defRPr>
-            </a:pPr>
-            <a:r>
-              <a:t>Focus on bars that cross the threshold</a:t>
+              <a:defRPr sz="1700">
+                <a:solidFill>
+                  <a:srgbClr val="333333"/>
+                </a:solidFill>
+                <a:latin typeface="Inter"/>
+              </a:defRPr>
+            </a:pPr>
+            <a:r>
+              <a:t>Steep slope = large effect</a:t>
             </a:r>
           </a:p>
           <a:p>
             <a:pPr>
               <a:spcAft>
-                <a:spcPts val="800"/>
+                <a:spcPts val="500"/>
               </a:spcAft>
-              <a:defRPr sz="2200" b="0">
-                <a:solidFill>
-                  <a:srgbClr val="222222"/>
-                </a:solidFill>
-                <a:latin typeface="Calibri"/>
-              </a:defRPr>
-            </a:pPr>
-            <a:r>
-              <a:t>The "vital few" factors are immediately obvious</a:t>
+              <a:defRPr sz="1700">
+                <a:solidFill>
+                  <a:srgbClr val="333333"/>
+                </a:solidFill>
+                <a:latin typeface="Inter"/>
+              </a:defRPr>
+            </a:pPr>
+            <a:r>
+              <a:t>Flat line = no effect</a:t>
             </a:r>
           </a:p>
           <a:p>
             <a:pPr>
               <a:spcAft>
-                <a:spcPts val="800"/>
+                <a:spcPts val="500"/>
               </a:spcAft>
-              <a:defRPr sz="2200" b="0">
-                <a:solidFill>
-                  <a:srgbClr val="222222"/>
-                </a:solidFill>
-                <a:latin typeface="Calibri"/>
-              </a:defRPr>
-            </a:pPr>
-            <a:r>
-              <a:t>doe-helper labels each bar with the factor/interaction name</a:t>
+              <a:defRPr sz="1700">
+                <a:solidFill>
+                  <a:srgbClr val="333333"/>
+                </a:solidFill>
+                <a:latin typeface="Inter"/>
+              </a:defRPr>
+            </a:pPr>
+            <a:r>
+              <a:t>Quick visual scan of what matters</a:t>
+            </a:r>
+          </a:p>
+        </p:txBody>
+      </p:sp>
+      <p:sp>
+        <p:nvSpPr>
+          <p:cNvPr id="9" name="Rounded Rectangle 8"/>
+          <p:cNvSpPr/>
+          <p:nvPr/>
+        </p:nvSpPr>
+        <p:spPr>
+          <a:xfrm>
+            <a:off x="6217920" y="1188720"/>
+            <a:ext cx="5303520" cy="4937760"/>
+          </a:xfrm>
+          <a:prstGeom prst="roundRect">
+            <a:avLst/>
+          </a:prstGeom>
+          <a:solidFill>
+            <a:srgbClr val="EEF2FF"/>
+          </a:solidFill>
+          <a:ln>
+            <a:noFill/>
+          </a:ln>
+        </p:spPr>
+        <p:style>
+          <a:lnRef idx="1">
+            <a:schemeClr val="accent1"/>
+          </a:lnRef>
+          <a:fillRef idx="3">
+            <a:schemeClr val="accent1"/>
+          </a:fillRef>
+          <a:effectRef idx="2">
+            <a:schemeClr val="accent1"/>
+          </a:effectRef>
+          <a:fontRef idx="minor">
+            <a:schemeClr val="lt1"/>
+          </a:fontRef>
+        </p:style>
+        <p:txBody>
+          <a:bodyPr rtlCol="0" anchor="ctr"/>
+          <a:lstStyle/>
+          <a:p>
+            <a:pPr algn="ctr"/>
+          </a:p>
+        </p:txBody>
+      </p:sp>
+      <p:sp>
+        <p:nvSpPr>
+          <p:cNvPr id="10" name="Rectangle 9"/>
+          <p:cNvSpPr/>
+          <p:nvPr/>
+        </p:nvSpPr>
+        <p:spPr>
+          <a:xfrm>
+            <a:off x="6217920" y="1188720"/>
+            <a:ext cx="36576" cy="4937760"/>
+          </a:xfrm>
+          <a:prstGeom prst="rect">
+            <a:avLst/>
+          </a:prstGeom>
+          <a:solidFill>
+            <a:srgbClr val="5046E5"/>
+          </a:solidFill>
+          <a:ln>
+            <a:noFill/>
+          </a:ln>
+        </p:spPr>
+        <p:style>
+          <a:lnRef idx="1">
+            <a:schemeClr val="accent1"/>
+          </a:lnRef>
+          <a:fillRef idx="3">
+            <a:schemeClr val="accent1"/>
+          </a:fillRef>
+          <a:effectRef idx="2">
+            <a:schemeClr val="accent1"/>
+          </a:effectRef>
+          <a:fontRef idx="minor">
+            <a:schemeClr val="lt1"/>
+          </a:fontRef>
+        </p:style>
+        <p:txBody>
+          <a:bodyPr rtlCol="0" anchor="ctr"/>
+          <a:lstStyle/>
+          <a:p>
+            <a:pPr algn="ctr"/>
+          </a:p>
+        </p:txBody>
+      </p:sp>
+      <p:sp>
+        <p:nvSpPr>
+          <p:cNvPr id="11" name="TextBox 10"/>
+          <p:cNvSpPr txBox="1"/>
+          <p:nvPr/>
+        </p:nvSpPr>
+        <p:spPr>
+          <a:xfrm>
+            <a:off x="6492240" y="1325880"/>
+            <a:ext cx="4754880" cy="365760"/>
+          </a:xfrm>
+          <a:prstGeom prst="rect">
+            <a:avLst/>
+          </a:prstGeom>
+          <a:noFill/>
+        </p:spPr>
+        <p:txBody>
+          <a:bodyPr wrap="square">
+            <a:spAutoFit/>
+          </a:bodyPr>
+          <a:lstStyle/>
+          <a:p>
+            <a:pPr algn="l">
+              <a:defRPr sz="1600" b="1">
+                <a:solidFill>
+                  <a:srgbClr val="5046E5"/>
+                </a:solidFill>
+                <a:latin typeface="Consolas"/>
+              </a:defRPr>
+            </a:pPr>
+            <a:r>
+              <a:t>INTERACTIONS</a:t>
+            </a:r>
+          </a:p>
+        </p:txBody>
+      </p:sp>
+      <p:sp>
+        <p:nvSpPr>
+          <p:cNvPr id="12" name="TextBox 11"/>
+          <p:cNvSpPr txBox="1"/>
+          <p:nvPr/>
+        </p:nvSpPr>
+        <p:spPr>
+          <a:xfrm>
+            <a:off x="6492240" y="1737360"/>
+            <a:ext cx="4754880" cy="4114800"/>
+          </a:xfrm>
+          <a:prstGeom prst="rect">
+            <a:avLst/>
+          </a:prstGeom>
+          <a:noFill/>
+        </p:spPr>
+        <p:txBody>
+          <a:bodyPr wrap="square">
+            <a:spAutoFit/>
+          </a:bodyPr>
+          <a:lstStyle/>
+          <a:p>
+            <a:pPr>
+              <a:spcAft>
+                <a:spcPts val="500"/>
+              </a:spcAft>
+              <a:defRPr sz="1700">
+                <a:solidFill>
+                  <a:srgbClr val="333333"/>
+                </a:solidFill>
+                <a:latin typeface="Inter"/>
+              </a:defRPr>
+            </a:pPr>
+            <a:r>
+              <a:t>Interaction Plot:</a:t>
+            </a:r>
+          </a:p>
+          <a:p>
+            <a:pPr>
+              <a:spcAft>
+                <a:spcPts val="500"/>
+              </a:spcAft>
+              <a:defRPr sz="1700">
+                <a:solidFill>
+                  <a:srgbClr val="333333"/>
+                </a:solidFill>
+                <a:latin typeface="Inter"/>
+              </a:defRPr>
+            </a:pPr>
+            <a:r>
+              <a:t>Response for each factor combination</a:t>
+            </a:r>
+          </a:p>
+          <a:p>
+            <a:pPr>
+              <a:spcAft>
+                <a:spcPts val="500"/>
+              </a:spcAft>
+              <a:defRPr sz="1700">
+                <a:solidFill>
+                  <a:srgbClr val="333333"/>
+                </a:solidFill>
+                <a:latin typeface="Inter"/>
+              </a:defRPr>
+            </a:pPr>
+            <a:r>
+              <a:t>Parallel lines = no interaction</a:t>
+            </a:r>
+          </a:p>
+          <a:p>
+            <a:pPr>
+              <a:spcAft>
+                <a:spcPts val="500"/>
+              </a:spcAft>
+              <a:defRPr sz="1700">
+                <a:solidFill>
+                  <a:srgbClr val="333333"/>
+                </a:solidFill>
+                <a:latin typeface="Inter"/>
+              </a:defRPr>
+            </a:pPr>
+            <a:r>
+              <a:t>Non-parallel / crossing = interaction</a:t>
+            </a:r>
+          </a:p>
+          <a:p>
+            <a:pPr>
+              <a:spcAft>
+                <a:spcPts val="500"/>
+              </a:spcAft>
+              <a:defRPr sz="1700">
+                <a:solidFill>
+                  <a:srgbClr val="333333"/>
+                </a:solidFill>
+                <a:latin typeface="Inter"/>
+              </a:defRPr>
+            </a:pPr>
+            <a:r>
+              <a:t>OVAT misses these completely</a:t>
+            </a:r>
+          </a:p>
+        </p:txBody>
+      </p:sp>
+      <p:sp>
+        <p:nvSpPr>
+          <p:cNvPr id="13" name="TextBox 12"/>
+          <p:cNvSpPr txBox="1"/>
+          <p:nvPr/>
+        </p:nvSpPr>
+        <p:spPr>
+          <a:xfrm>
+            <a:off x="731520" y="6400800"/>
+            <a:ext cx="10058400" cy="365760"/>
+          </a:xfrm>
+          <a:prstGeom prst="rect">
+            <a:avLst/>
+          </a:prstGeom>
+          <a:noFill/>
+        </p:spPr>
+        <p:txBody>
+          <a:bodyPr wrap="square">
+            <a:spAutoFit/>
+          </a:bodyPr>
+          <a:lstStyle/>
+          <a:p>
+            <a:pPr algn="l">
+              <a:defRPr sz="1000" b="0">
+                <a:solidFill>
+                  <a:srgbClr val="999999"/>
+                </a:solidFill>
+                <a:latin typeface="Consolas"/>
+              </a:defRPr>
+            </a:pPr>
+            <a:r>
+              <a:t>© 2026 Martin J. Gallagher  |  GPL-3.0-or-later  |  doehelper.com</a:t>
             </a:r>
           </a:p>
         </p:txBody>
@@ -5692,7 +6844,7 @@
     <p:bg>
       <p:bgPr>
         <a:solidFill>
-          <a:srgbClr val="FFFFFF"/>
+          <a:srgbClr val="FAFAFA"/>
         </a:solidFill>
         <a:effectLst/>
       </p:bgPr>
@@ -5713,13 +6865,13 @@
         <p:spPr>
           <a:xfrm>
             <a:off x="0" y="0"/>
-            <a:ext cx="12191695" cy="54864"/>
+            <a:ext cx="12191695" cy="45720"/>
           </a:xfrm>
           <a:prstGeom prst="rect">
             <a:avLst/>
           </a:prstGeom>
           <a:solidFill>
-            <a:srgbClr val="007BFF"/>
+            <a:srgbClr val="5046E5"/>
           </a:solidFill>
           <a:ln>
             <a:noFill/>
@@ -5749,14 +6901,57 @@
       </p:sp>
       <p:sp>
         <p:nvSpPr>
-          <p:cNvPr id="3" name="TextBox 2"/>
+          <p:cNvPr id="3" name="Rectangle 2"/>
+          <p:cNvSpPr/>
+          <p:nvPr/>
+        </p:nvSpPr>
+        <p:spPr>
+          <a:xfrm>
+            <a:off x="548640" y="411480"/>
+            <a:ext cx="36576" cy="502920"/>
+          </a:xfrm>
+          <a:prstGeom prst="rect">
+            <a:avLst/>
+          </a:prstGeom>
+          <a:solidFill>
+            <a:srgbClr val="5046E5"/>
+          </a:solidFill>
+          <a:ln>
+            <a:noFill/>
+          </a:ln>
+        </p:spPr>
+        <p:style>
+          <a:lnRef idx="1">
+            <a:schemeClr val="accent1"/>
+          </a:lnRef>
+          <a:fillRef idx="3">
+            <a:schemeClr val="accent1"/>
+          </a:fillRef>
+          <a:effectRef idx="2">
+            <a:schemeClr val="accent1"/>
+          </a:effectRef>
+          <a:fontRef idx="minor">
+            <a:schemeClr val="lt1"/>
+          </a:fontRef>
+        </p:style>
+        <p:txBody>
+          <a:bodyPr rtlCol="0" anchor="ctr"/>
+          <a:lstStyle/>
+          <a:p>
+            <a:pPr algn="ctr"/>
+          </a:p>
+        </p:txBody>
+      </p:sp>
+      <p:sp>
+        <p:nvSpPr>
+          <p:cNvPr id="4" name="TextBox 3"/>
           <p:cNvSpPr txBox="1"/>
           <p:nvPr/>
         </p:nvSpPr>
         <p:spPr>
           <a:xfrm>
-            <a:off x="731520" y="365760"/>
-            <a:ext cx="10515600" cy="822960"/>
+            <a:off x="777240" y="365760"/>
+            <a:ext cx="10058400" cy="640080"/>
           </a:xfrm>
           <a:prstGeom prst="rect">
             <a:avLst/>
@@ -5769,30 +6964,30 @@
           </a:bodyPr>
           <a:lstStyle/>
           <a:p>
-            <a:pPr>
-              <a:defRPr sz="3200" b="1">
-                <a:solidFill>
-                  <a:srgbClr val="222222"/>
-                </a:solidFill>
-                <a:latin typeface="Calibri"/>
-              </a:defRPr>
-            </a:pPr>
-            <a:r>
-              <a:t>Main Effects and Interaction Plots</a:t>
-            </a:r>
-          </a:p>
-        </p:txBody>
-      </p:sp>
-      <p:sp>
-        <p:nvSpPr>
-          <p:cNvPr id="4" name="TextBox 3"/>
+            <a:pPr algn="l">
+              <a:defRPr sz="2800" b="1">
+                <a:solidFill>
+                  <a:srgbClr val="111111"/>
+                </a:solidFill>
+                <a:latin typeface="Inter"/>
+              </a:defRPr>
+            </a:pPr>
+            <a:r>
+              <a:t>Normal Probability Plot of Effects</a:t>
+            </a:r>
+          </a:p>
+        </p:txBody>
+      </p:sp>
+      <p:sp>
+        <p:nvSpPr>
+          <p:cNvPr id="5" name="TextBox 4"/>
           <p:cNvSpPr txBox="1"/>
           <p:nvPr/>
         </p:nvSpPr>
         <p:spPr>
           <a:xfrm>
-            <a:off x="914400" y="1463040"/>
-            <a:ext cx="10058400" cy="4754880"/>
+            <a:off x="822960" y="1188720"/>
+            <a:ext cx="10241280" cy="5120640"/>
           </a:xfrm>
           <a:prstGeom prst="rect">
             <a:avLst/>
@@ -5807,142 +7002,133 @@
           <a:p>
             <a:pPr>
               <a:spcAft>
-                <a:spcPts val="800"/>
+                <a:spcPts val="600"/>
               </a:spcAft>
-              <a:defRPr sz="2200" b="0">
-                <a:solidFill>
-                  <a:srgbClr val="222222"/>
-                </a:solidFill>
-                <a:latin typeface="Calibri"/>
-              </a:defRPr>
-            </a:pPr>
-            <a:r>
-              <a:t>Main Effects Plot:</a:t>
+              <a:defRPr sz="1900">
+                <a:solidFill>
+                  <a:srgbClr val="333333"/>
+                </a:solidFill>
+                <a:latin typeface="Inter"/>
+              </a:defRPr>
+            </a:pPr>
+            <a:r>
+              <a:t>Plots effect estimates vs. expected normal quantiles</a:t>
+            </a:r>
+          </a:p>
+          <a:p>
+            <a:pPr>
+              <a:spcAft>
+                <a:spcPts val="600"/>
+              </a:spcAft>
+              <a:defRPr sz="1900">
+                <a:solidFill>
+                  <a:srgbClr val="333333"/>
+                </a:solidFill>
+                <a:latin typeface="Inter"/>
+              </a:defRPr>
+            </a:pPr>
+            <a:r>
+              <a:t>Inactive effects fall on a straight line through zero</a:t>
+            </a:r>
+          </a:p>
+          <a:p>
+            <a:pPr>
+              <a:spcAft>
+                <a:spcPts val="600"/>
+              </a:spcAft>
+              <a:defRPr sz="1900">
+                <a:solidFill>
+                  <a:srgbClr val="333333"/>
+                </a:solidFill>
+                <a:latin typeface="Inter"/>
+              </a:defRPr>
+            </a:pPr>
+            <a:r>
+              <a:t>Active effects deviate from the line</a:t>
+            </a:r>
+          </a:p>
+          <a:p>
+            <a:pPr>
+              <a:spcAft>
+                <a:spcPts val="600"/>
+              </a:spcAft>
+              <a:defRPr sz="1900">
+                <a:solidFill>
+                  <a:srgbClr val="333333"/>
+                </a:solidFill>
+                <a:latin typeface="Inter"/>
+              </a:defRPr>
+            </a:pPr>
+            <a:r>
+              <a:t>Particularly useful for unreplicated designs</a:t>
             </a:r>
           </a:p>
           <a:p>
             <a:pPr lvl="1">
               <a:spcAft>
-                <a:spcPts val="800"/>
+                <a:spcPts val="600"/>
+              </a:spcAft>
+              <a:defRPr sz="1700">
+                <a:solidFill>
+                  <a:srgbClr val="666666"/>
+                </a:solidFill>
+                <a:latin typeface="Inter"/>
+              </a:defRPr>
+            </a:pPr>
+            <a:r>
+              <a:t>No error estimate available → use this visual method</a:t>
+            </a:r>
+          </a:p>
+          <a:p>
+            <a:pPr>
+              <a:spcAft>
+                <a:spcPts val="600"/>
               </a:spcAft>
               <a:defRPr sz="1900">
                 <a:solidFill>
-                  <a:srgbClr val="222222"/>
-                </a:solidFill>
-                <a:latin typeface="Calibri"/>
-              </a:defRPr>
-            </a:pPr>
-            <a:r>
-              <a:t>Shows average response at each level of each factor</a:t>
-            </a:r>
-          </a:p>
-          <a:p>
-            <a:pPr lvl="1">
-              <a:spcAft>
-                <a:spcPts val="800"/>
-              </a:spcAft>
-              <a:defRPr sz="1900">
-                <a:solidFill>
-                  <a:srgbClr val="222222"/>
-                </a:solidFill>
-                <a:latin typeface="Calibri"/>
-              </a:defRPr>
-            </a:pPr>
-            <a:r>
-              <a:t>Steep slope = large effect; flat = no effect</a:t>
-            </a:r>
-          </a:p>
-          <a:p>
-            <a:pPr lvl="1">
-              <a:spcAft>
-                <a:spcPts val="800"/>
-              </a:spcAft>
-              <a:defRPr sz="1900">
-                <a:solidFill>
-                  <a:srgbClr val="222222"/>
-                </a:solidFill>
-                <a:latin typeface="Calibri"/>
-              </a:defRPr>
-            </a:pPr>
-            <a:r>
-              <a:t>Quick visual scan of which factors matter</a:t>
-            </a:r>
-          </a:p>
-          <a:p>
-            <a:pPr>
-              <a:spcAft>
-                <a:spcPts val="800"/>
-              </a:spcAft>
-              <a:defRPr sz="2200" b="0">
-                <a:solidFill>
-                  <a:srgbClr val="222222"/>
-                </a:solidFill>
-                <a:latin typeface="Calibri"/>
-              </a:defRPr>
-            </a:pPr>
-          </a:p>
-          <a:p>
-            <a:pPr>
-              <a:spcAft>
-                <a:spcPts val="800"/>
-              </a:spcAft>
-              <a:defRPr sz="2200" b="0">
-                <a:solidFill>
-                  <a:srgbClr val="222222"/>
-                </a:solidFill>
-                <a:latin typeface="Calibri"/>
-              </a:defRPr>
-            </a:pPr>
-            <a:r>
-              <a:t>Interaction Plot:</a:t>
-            </a:r>
-          </a:p>
-          <a:p>
-            <a:pPr lvl="1">
-              <a:spcAft>
-                <a:spcPts val="800"/>
-              </a:spcAft>
-              <a:defRPr sz="1900">
-                <a:solidFill>
-                  <a:srgbClr val="222222"/>
-                </a:solidFill>
-                <a:latin typeface="Calibri"/>
-              </a:defRPr>
-            </a:pPr>
-            <a:r>
-              <a:t>Shows response for each combination of two factors</a:t>
-            </a:r>
-          </a:p>
-          <a:p>
-            <a:pPr lvl="1">
-              <a:spcAft>
-                <a:spcPts val="800"/>
-              </a:spcAft>
-              <a:defRPr sz="1900">
-                <a:solidFill>
-                  <a:srgbClr val="222222"/>
-                </a:solidFill>
-                <a:latin typeface="Calibri"/>
-              </a:defRPr>
-            </a:pPr>
-            <a:r>
-              <a:t>Parallel lines = no interaction</a:t>
-            </a:r>
-          </a:p>
-          <a:p>
-            <a:pPr lvl="1">
-              <a:spcAft>
-                <a:spcPts val="800"/>
-              </a:spcAft>
-              <a:defRPr sz="1900">
-                <a:solidFill>
-                  <a:srgbClr val="222222"/>
-                </a:solidFill>
-                <a:latin typeface="Calibri"/>
-              </a:defRPr>
-            </a:pPr>
-            <a:r>
-              <a:t>Non-parallel (crossing) lines = interaction present</a:t>
+                  <a:srgbClr val="333333"/>
+                </a:solidFill>
+                <a:latin typeface="Inter"/>
+              </a:defRPr>
+            </a:pPr>
+            <a:r>
+              <a:t>doe-helper generates both normal and half-normal plots</a:t>
+            </a:r>
+          </a:p>
+        </p:txBody>
+      </p:sp>
+      <p:sp>
+        <p:nvSpPr>
+          <p:cNvPr id="6" name="TextBox 5"/>
+          <p:cNvSpPr txBox="1"/>
+          <p:nvPr/>
+        </p:nvSpPr>
+        <p:spPr>
+          <a:xfrm>
+            <a:off x="731520" y="6400800"/>
+            <a:ext cx="10058400" cy="365760"/>
+          </a:xfrm>
+          <a:prstGeom prst="rect">
+            <a:avLst/>
+          </a:prstGeom>
+          <a:noFill/>
+        </p:spPr>
+        <p:txBody>
+          <a:bodyPr wrap="square">
+            <a:spAutoFit/>
+          </a:bodyPr>
+          <a:lstStyle/>
+          <a:p>
+            <a:pPr algn="l">
+              <a:defRPr sz="1000" b="0">
+                <a:solidFill>
+                  <a:srgbClr val="999999"/>
+                </a:solidFill>
+                <a:latin typeface="Consolas"/>
+              </a:defRPr>
+            </a:pPr>
+            <a:r>
+              <a:t>© 2026 Martin J. Gallagher  |  GPL-3.0-or-later  |  doehelper.com</a:t>
             </a:r>
           </a:p>
         </p:txBody>
@@ -5961,7 +7147,7 @@
     <p:bg>
       <p:bgPr>
         <a:solidFill>
-          <a:srgbClr val="FFFFFF"/>
+          <a:srgbClr val="FAFAFA"/>
         </a:solidFill>
         <a:effectLst/>
       </p:bgPr>
@@ -5982,13 +7168,13 @@
         <p:spPr>
           <a:xfrm>
             <a:off x="0" y="0"/>
-            <a:ext cx="12191695" cy="54864"/>
+            <a:ext cx="12191695" cy="45720"/>
           </a:xfrm>
           <a:prstGeom prst="rect">
             <a:avLst/>
           </a:prstGeom>
           <a:solidFill>
-            <a:srgbClr val="007BFF"/>
+            <a:srgbClr val="5046E5"/>
           </a:solidFill>
           <a:ln>
             <a:noFill/>
@@ -6018,14 +7204,57 @@
       </p:sp>
       <p:sp>
         <p:nvSpPr>
-          <p:cNvPr id="3" name="TextBox 2"/>
+          <p:cNvPr id="3" name="Rectangle 2"/>
+          <p:cNvSpPr/>
+          <p:nvPr/>
+        </p:nvSpPr>
+        <p:spPr>
+          <a:xfrm>
+            <a:off x="548640" y="411480"/>
+            <a:ext cx="36576" cy="502920"/>
+          </a:xfrm>
+          <a:prstGeom prst="rect">
+            <a:avLst/>
+          </a:prstGeom>
+          <a:solidFill>
+            <a:srgbClr val="5046E5"/>
+          </a:solidFill>
+          <a:ln>
+            <a:noFill/>
+          </a:ln>
+        </p:spPr>
+        <p:style>
+          <a:lnRef idx="1">
+            <a:schemeClr val="accent1"/>
+          </a:lnRef>
+          <a:fillRef idx="3">
+            <a:schemeClr val="accent1"/>
+          </a:fillRef>
+          <a:effectRef idx="2">
+            <a:schemeClr val="accent1"/>
+          </a:effectRef>
+          <a:fontRef idx="minor">
+            <a:schemeClr val="lt1"/>
+          </a:fontRef>
+        </p:style>
+        <p:txBody>
+          <a:bodyPr rtlCol="0" anchor="ctr"/>
+          <a:lstStyle/>
+          <a:p>
+            <a:pPr algn="ctr"/>
+          </a:p>
+        </p:txBody>
+      </p:sp>
+      <p:sp>
+        <p:nvSpPr>
+          <p:cNvPr id="4" name="TextBox 3"/>
           <p:cNvSpPr txBox="1"/>
           <p:nvPr/>
         </p:nvSpPr>
         <p:spPr>
           <a:xfrm>
-            <a:off x="731520" y="365760"/>
-            <a:ext cx="10515600" cy="822960"/>
+            <a:off x="777240" y="365760"/>
+            <a:ext cx="10058400" cy="640080"/>
           </a:xfrm>
           <a:prstGeom prst="rect">
             <a:avLst/>
@@ -6038,30 +7267,30 @@
           </a:bodyPr>
           <a:lstStyle/>
           <a:p>
-            <a:pPr>
-              <a:defRPr sz="3200" b="1">
-                <a:solidFill>
-                  <a:srgbClr val="222222"/>
-                </a:solidFill>
-                <a:latin typeface="Calibri"/>
-              </a:defRPr>
-            </a:pPr>
-            <a:r>
-              <a:t>Normal Probability Plot of Effects</a:t>
-            </a:r>
-          </a:p>
-        </p:txBody>
-      </p:sp>
-      <p:sp>
-        <p:nvSpPr>
-          <p:cNvPr id="4" name="TextBox 3"/>
+            <a:pPr algn="l">
+              <a:defRPr sz="2800" b="1">
+                <a:solidFill>
+                  <a:srgbClr val="111111"/>
+                </a:solidFill>
+                <a:latin typeface="Inter"/>
+              </a:defRPr>
+            </a:pPr>
+            <a:r>
+              <a:t>Residual Diagnostics (4-Panel Plot)</a:t>
+            </a:r>
+          </a:p>
+        </p:txBody>
+      </p:sp>
+      <p:sp>
+        <p:nvSpPr>
+          <p:cNvPr id="5" name="TextBox 4"/>
           <p:cNvSpPr txBox="1"/>
           <p:nvPr/>
         </p:nvSpPr>
         <p:spPr>
           <a:xfrm>
-            <a:off x="914400" y="1463040"/>
-            <a:ext cx="10058400" cy="4754880"/>
+            <a:off x="822960" y="1188720"/>
+            <a:ext cx="10241280" cy="5120640"/>
           </a:xfrm>
           <a:prstGeom prst="rect">
             <a:avLst/>
@@ -6076,97 +7305,149 @@
           <a:p>
             <a:pPr>
               <a:spcAft>
-                <a:spcPts val="800"/>
+                <a:spcPts val="600"/>
               </a:spcAft>
-              <a:defRPr sz="2200" b="0">
-                <a:solidFill>
-                  <a:srgbClr val="222222"/>
-                </a:solidFill>
-                <a:latin typeface="Calibri"/>
-              </a:defRPr>
-            </a:pPr>
-            <a:r>
-              <a:t>Plots effect estimates against expected normal quantiles</a:t>
+              <a:defRPr sz="1900">
+                <a:solidFill>
+                  <a:srgbClr val="333333"/>
+                </a:solidFill>
+                <a:latin typeface="Inter"/>
+              </a:defRPr>
+            </a:pPr>
+            <a:r>
+              <a:t>1. Residuals vs. Fitted — check for patterns (should be random)</a:t>
+            </a:r>
+          </a:p>
+          <a:p>
+            <a:pPr lvl="1">
+              <a:spcAft>
+                <a:spcPts val="600"/>
+              </a:spcAft>
+              <a:defRPr sz="1700">
+                <a:solidFill>
+                  <a:srgbClr val="666666"/>
+                </a:solidFill>
+                <a:latin typeface="Inter"/>
+              </a:defRPr>
+            </a:pPr>
+            <a:r>
+              <a:t>Funnel shape → non-constant variance (transform response)</a:t>
+            </a:r>
+          </a:p>
+          <a:p>
+            <a:pPr lvl="1">
+              <a:spcAft>
+                <a:spcPts val="600"/>
+              </a:spcAft>
+              <a:defRPr sz="1700">
+                <a:solidFill>
+                  <a:srgbClr val="666666"/>
+                </a:solidFill>
+                <a:latin typeface="Inter"/>
+              </a:defRPr>
+            </a:pPr>
+            <a:r>
+              <a:t>Curve → missing quadratic terms (need RSM)</a:t>
             </a:r>
           </a:p>
           <a:p>
             <a:pPr>
               <a:spcAft>
-                <a:spcPts val="800"/>
+                <a:spcPts val="600"/>
               </a:spcAft>
-              <a:defRPr sz="2200" b="0">
-                <a:solidFill>
-                  <a:srgbClr val="222222"/>
-                </a:solidFill>
-                <a:latin typeface="Calibri"/>
-              </a:defRPr>
-            </a:pPr>
-            <a:r>
-              <a:t>Inactive effects fall on a straight line through zero</a:t>
+              <a:defRPr sz="1900">
+                <a:solidFill>
+                  <a:srgbClr val="333333"/>
+                </a:solidFill>
+                <a:latin typeface="Inter"/>
+              </a:defRPr>
+            </a:pPr>
+            <a:r>
+              <a:t>2. Normal Q-Q — residuals should follow normal distribution</a:t>
             </a:r>
           </a:p>
           <a:p>
             <a:pPr>
               <a:spcAft>
-                <a:spcPts val="800"/>
+                <a:spcPts val="600"/>
               </a:spcAft>
-              <a:defRPr sz="2200" b="0">
-                <a:solidFill>
-                  <a:srgbClr val="222222"/>
-                </a:solidFill>
-                <a:latin typeface="Calibri"/>
-              </a:defRPr>
-            </a:pPr>
-            <a:r>
-              <a:t>Active effects deviate from the line</a:t>
+              <a:defRPr sz="1900">
+                <a:solidFill>
+                  <a:srgbClr val="333333"/>
+                </a:solidFill>
+                <a:latin typeface="Inter"/>
+              </a:defRPr>
+            </a:pPr>
+            <a:r>
+              <a:t>3. Residuals vs. Run Order — check for time trends</a:t>
             </a:r>
           </a:p>
           <a:p>
             <a:pPr>
               <a:spcAft>
-                <a:spcPts val="800"/>
-              </a:spcAft>
-              <a:defRPr sz="2200" b="0">
-                <a:solidFill>
-                  <a:srgbClr val="222222"/>
-                </a:solidFill>
-                <a:latin typeface="Calibri"/>
-              </a:defRPr>
-            </a:pPr>
-            <a:r>
-              <a:t>Particularly useful for unreplicated designs</a:t>
-            </a:r>
-          </a:p>
-          <a:p>
-            <a:pPr lvl="1">
-              <a:spcAft>
-                <a:spcPts val="800"/>
+                <a:spcPts val="600"/>
               </a:spcAft>
               <a:defRPr sz="1900">
                 <a:solidFill>
-                  <a:srgbClr val="222222"/>
-                </a:solidFill>
-                <a:latin typeface="Calibri"/>
-              </a:defRPr>
-            </a:pPr>
-            <a:r>
-              <a:t>No error estimate available -&gt; use this visual method</a:t>
+                  <a:srgbClr val="333333"/>
+                </a:solidFill>
+                <a:latin typeface="Inter"/>
+              </a:defRPr>
+            </a:pPr>
+            <a:r>
+              <a:t>4. Residuals Histogram — should be roughly bell-shaped</a:t>
             </a:r>
           </a:p>
           <a:p>
             <a:pPr>
               <a:spcAft>
-                <a:spcPts val="800"/>
+                <a:spcPts val="600"/>
               </a:spcAft>
-              <a:defRPr sz="2200" b="0">
-                <a:solidFill>
-                  <a:srgbClr val="222222"/>
-                </a:solidFill>
-                <a:latin typeface="Calibri"/>
-              </a:defRPr>
-            </a:pPr>
-            <a:r>
-              <a:t>doe-helper generates both normal and half-normal plots</a:t>
+              <a:defRPr sz="1900">
+                <a:solidFill>
+                  <a:srgbClr val="333333"/>
+                </a:solidFill>
+                <a:latin typeface="Inter"/>
+              </a:defRPr>
+            </a:pPr>
+            <a:r>
+              <a:t>Patterns in residuals signal model problems</a:t>
+            </a:r>
+          </a:p>
+        </p:txBody>
+      </p:sp>
+      <p:sp>
+        <p:nvSpPr>
+          <p:cNvPr id="6" name="TextBox 5"/>
+          <p:cNvSpPr txBox="1"/>
+          <p:nvPr/>
+        </p:nvSpPr>
+        <p:spPr>
+          <a:xfrm>
+            <a:off x="731520" y="6400800"/>
+            <a:ext cx="10058400" cy="365760"/>
+          </a:xfrm>
+          <a:prstGeom prst="rect">
+            <a:avLst/>
+          </a:prstGeom>
+          <a:noFill/>
+        </p:spPr>
+        <p:txBody>
+          <a:bodyPr wrap="square">
+            <a:spAutoFit/>
+          </a:bodyPr>
+          <a:lstStyle/>
+          <a:p>
+            <a:pPr algn="l">
+              <a:defRPr sz="1000" b="0">
+                <a:solidFill>
+                  <a:srgbClr val="999999"/>
+                </a:solidFill>
+                <a:latin typeface="Consolas"/>
+              </a:defRPr>
+            </a:pPr>
+            <a:r>
+              <a:t>© 2026 Martin J. Gallagher  |  GPL-3.0-or-later  |  doehelper.com</a:t>
             </a:r>
           </a:p>
         </p:txBody>
@@ -6185,7 +7466,7 @@
     <p:bg>
       <p:bgPr>
         <a:solidFill>
-          <a:srgbClr val="FFFFFF"/>
+          <a:srgbClr val="FAFAFA"/>
         </a:solidFill>
         <a:effectLst/>
       </p:bgPr>
@@ -6206,13 +7487,13 @@
         <p:spPr>
           <a:xfrm>
             <a:off x="0" y="0"/>
-            <a:ext cx="12191695" cy="54864"/>
+            <a:ext cx="12191695" cy="45720"/>
           </a:xfrm>
           <a:prstGeom prst="rect">
             <a:avLst/>
           </a:prstGeom>
           <a:solidFill>
-            <a:srgbClr val="007BFF"/>
+            <a:srgbClr val="5046E5"/>
           </a:solidFill>
           <a:ln>
             <a:noFill/>
@@ -6242,14 +7523,57 @@
       </p:sp>
       <p:sp>
         <p:nvSpPr>
-          <p:cNvPr id="3" name="TextBox 2"/>
+          <p:cNvPr id="3" name="Rectangle 2"/>
+          <p:cNvSpPr/>
+          <p:nvPr/>
+        </p:nvSpPr>
+        <p:spPr>
+          <a:xfrm>
+            <a:off x="548640" y="411480"/>
+            <a:ext cx="36576" cy="502920"/>
+          </a:xfrm>
+          <a:prstGeom prst="rect">
+            <a:avLst/>
+          </a:prstGeom>
+          <a:solidFill>
+            <a:srgbClr val="5046E5"/>
+          </a:solidFill>
+          <a:ln>
+            <a:noFill/>
+          </a:ln>
+        </p:spPr>
+        <p:style>
+          <a:lnRef idx="1">
+            <a:schemeClr val="accent1"/>
+          </a:lnRef>
+          <a:fillRef idx="3">
+            <a:schemeClr val="accent1"/>
+          </a:fillRef>
+          <a:effectRef idx="2">
+            <a:schemeClr val="accent1"/>
+          </a:effectRef>
+          <a:fontRef idx="minor">
+            <a:schemeClr val="lt1"/>
+          </a:fontRef>
+        </p:style>
+        <p:txBody>
+          <a:bodyPr rtlCol="0" anchor="ctr"/>
+          <a:lstStyle/>
+          <a:p>
+            <a:pPr algn="ctr"/>
+          </a:p>
+        </p:txBody>
+      </p:sp>
+      <p:sp>
+        <p:nvSpPr>
+          <p:cNvPr id="4" name="TextBox 3"/>
           <p:cNvSpPr txBox="1"/>
           <p:nvPr/>
         </p:nvSpPr>
         <p:spPr>
           <a:xfrm>
-            <a:off x="731520" y="365760"/>
-            <a:ext cx="10515600" cy="822960"/>
+            <a:off x="777240" y="365760"/>
+            <a:ext cx="10058400" cy="640080"/>
           </a:xfrm>
           <a:prstGeom prst="rect">
             <a:avLst/>
@@ -6262,30 +7586,30 @@
           </a:bodyPr>
           <a:lstStyle/>
           <a:p>
-            <a:pPr>
-              <a:defRPr sz="3200" b="1">
-                <a:solidFill>
-                  <a:srgbClr val="222222"/>
-                </a:solidFill>
-                <a:latin typeface="Calibri"/>
-              </a:defRPr>
-            </a:pPr>
-            <a:r>
-              <a:t>Residual Diagnostics</a:t>
-            </a:r>
-          </a:p>
-        </p:txBody>
-      </p:sp>
-      <p:sp>
-        <p:nvSpPr>
-          <p:cNvPr id="4" name="TextBox 3"/>
+            <a:pPr algn="l">
+              <a:defRPr sz="2800" b="1">
+                <a:solidFill>
+                  <a:srgbClr val="111111"/>
+                </a:solidFill>
+                <a:latin typeface="Inter"/>
+              </a:defRPr>
+            </a:pPr>
+            <a:r>
+              <a:t>Model Adequacy Statistics</a:t>
+            </a:r>
+          </a:p>
+        </p:txBody>
+      </p:sp>
+      <p:sp>
+        <p:nvSpPr>
+          <p:cNvPr id="5" name="TextBox 4"/>
           <p:cNvSpPr txBox="1"/>
           <p:nvPr/>
         </p:nvSpPr>
         <p:spPr>
           <a:xfrm>
-            <a:off x="914400" y="1463040"/>
-            <a:ext cx="10058400" cy="4754880"/>
+            <a:off x="822960" y="1188720"/>
+            <a:ext cx="10241280" cy="5120640"/>
           </a:xfrm>
           <a:prstGeom prst="rect">
             <a:avLst/>
@@ -6300,145 +7624,149 @@
           <a:p>
             <a:pPr>
               <a:spcAft>
-                <a:spcPts val="800"/>
+                <a:spcPts val="600"/>
               </a:spcAft>
-              <a:defRPr sz="2200" b="0">
-                <a:solidFill>
-                  <a:srgbClr val="222222"/>
-                </a:solidFill>
-                <a:latin typeface="Calibri"/>
-              </a:defRPr>
-            </a:pPr>
-            <a:r>
-              <a:t>Residuals = observed - predicted values</a:t>
+              <a:defRPr sz="1900">
+                <a:solidFill>
+                  <a:srgbClr val="333333"/>
+                </a:solidFill>
+                <a:latin typeface="Inter"/>
+              </a:defRPr>
+            </a:pPr>
+            <a:r>
+              <a:t>R² — fraction of variability explained (R² &gt; 0.9 is good)</a:t>
             </a:r>
           </a:p>
           <a:p>
             <a:pPr>
               <a:spcAft>
-                <a:spcPts val="800"/>
+                <a:spcPts val="600"/>
               </a:spcAft>
-              <a:defRPr sz="2200" b="0">
-                <a:solidFill>
-                  <a:srgbClr val="222222"/>
-                </a:solidFill>
-                <a:latin typeface="Calibri"/>
-              </a:defRPr>
-            </a:pPr>
-            <a:r>
-              <a:t>Four-panel diagnostic plot from doe analyze:</a:t>
+              <a:defRPr sz="1900">
+                <a:solidFill>
+                  <a:srgbClr val="333333"/>
+                </a:solidFill>
+                <a:latin typeface="Inter"/>
+              </a:defRPr>
+            </a:pPr>
+            <a:r>
+              <a:t>Adjusted R² — penalised for number of terms</a:t>
             </a:r>
           </a:p>
           <a:p>
             <a:pPr lvl="1">
               <a:spcAft>
-                <a:spcPts val="800"/>
+                <a:spcPts val="600"/>
+              </a:spcAft>
+              <a:defRPr sz="1700">
+                <a:solidFill>
+                  <a:srgbClr val="666666"/>
+                </a:solidFill>
+                <a:latin typeface="Inter"/>
+              </a:defRPr>
+            </a:pPr>
+            <a:r>
+              <a:t>Should be close to R² (big gap = overfitting)</a:t>
+            </a:r>
+          </a:p>
+          <a:p>
+            <a:pPr>
+              <a:spcAft>
+                <a:spcPts val="600"/>
               </a:spcAft>
               <a:defRPr sz="1900">
                 <a:solidFill>
-                  <a:srgbClr val="222222"/>
-                </a:solidFill>
-                <a:latin typeface="Calibri"/>
-              </a:defRPr>
-            </a:pPr>
-            <a:r>
-              <a:t>1. Residuals vs. Fitted: check for patterns (should be random)</a:t>
+                  <a:srgbClr val="333333"/>
+                </a:solidFill>
+                <a:latin typeface="Inter"/>
+              </a:defRPr>
+            </a:pPr>
+            <a:r>
+              <a:t>Predicted R² (PRESS) — cross-validation metric</a:t>
             </a:r>
           </a:p>
           <a:p>
             <a:pPr lvl="1">
               <a:spcAft>
-                <a:spcPts val="800"/>
+                <a:spcPts val="600"/>
+              </a:spcAft>
+              <a:defRPr sz="1700">
+                <a:solidFill>
+                  <a:srgbClr val="666666"/>
+                </a:solidFill>
+                <a:latin typeface="Inter"/>
+              </a:defRPr>
+            </a:pPr>
+            <a:r>
+              <a:t>Should agree with Adj R² within ~0.2</a:t>
+            </a:r>
+          </a:p>
+          <a:p>
+            <a:pPr>
+              <a:spcAft>
+                <a:spcPts val="600"/>
               </a:spcAft>
               <a:defRPr sz="1900">
                 <a:solidFill>
-                  <a:srgbClr val="222222"/>
-                </a:solidFill>
-                <a:latin typeface="Calibri"/>
-              </a:defRPr>
-            </a:pPr>
-            <a:r>
-              <a:t>2. Normal Q-Q plot: residuals should follow a normal distribution</a:t>
+                  <a:srgbClr val="333333"/>
+                </a:solidFill>
+                <a:latin typeface="Inter"/>
+              </a:defRPr>
+            </a:pPr>
+            <a:r>
+              <a:t>Lack-of-Fit test — is the model adequate?</a:t>
             </a:r>
           </a:p>
           <a:p>
             <a:pPr lvl="1">
               <a:spcAft>
-                <a:spcPts val="800"/>
+                <a:spcPts val="600"/>
               </a:spcAft>
-              <a:defRPr sz="1900">
-                <a:solidFill>
-                  <a:srgbClr val="222222"/>
-                </a:solidFill>
-                <a:latin typeface="Calibri"/>
-              </a:defRPr>
-            </a:pPr>
-            <a:r>
-              <a:t>3. Residuals vs. Run order: check for time trends</a:t>
-            </a:r>
-          </a:p>
-          <a:p>
-            <a:pPr lvl="1">
-              <a:spcAft>
-                <a:spcPts val="800"/>
-              </a:spcAft>
-              <a:defRPr sz="1900">
-                <a:solidFill>
-                  <a:srgbClr val="222222"/>
-                </a:solidFill>
-                <a:latin typeface="Calibri"/>
-              </a:defRPr>
-            </a:pPr>
-            <a:r>
-              <a:t>4. Residuals histogram: should be roughly bell-shaped</a:t>
-            </a:r>
-          </a:p>
-          <a:p>
-            <a:pPr>
-              <a:spcAft>
-                <a:spcPts val="800"/>
-              </a:spcAft>
-              <a:defRPr sz="2200" b="0">
-                <a:solidFill>
-                  <a:srgbClr val="222222"/>
-                </a:solidFill>
-                <a:latin typeface="Calibri"/>
-              </a:defRPr>
-            </a:pPr>
-            <a:r>
-              <a:t>Patterns in residuals signal model problems:</a:t>
-            </a:r>
-          </a:p>
-          <a:p>
-            <a:pPr lvl="1">
-              <a:spcAft>
-                <a:spcPts val="800"/>
-              </a:spcAft>
-              <a:defRPr sz="1900">
-                <a:solidFill>
-                  <a:srgbClr val="222222"/>
-                </a:solidFill>
-                <a:latin typeface="Calibri"/>
-              </a:defRPr>
-            </a:pPr>
-            <a:r>
-              <a:t>Funnel shape -&gt; non-constant variance (transform response)</a:t>
-            </a:r>
-          </a:p>
-          <a:p>
-            <a:pPr lvl="1">
-              <a:spcAft>
-                <a:spcPts val="800"/>
-              </a:spcAft>
-              <a:defRPr sz="1900">
-                <a:solidFill>
-                  <a:srgbClr val="222222"/>
-                </a:solidFill>
-                <a:latin typeface="Calibri"/>
-              </a:defRPr>
-            </a:pPr>
-            <a:r>
-              <a:t>Curve -&gt; missing quadratic terms (need RSM)</a:t>
+              <a:defRPr sz="1700">
+                <a:solidFill>
+                  <a:srgbClr val="666666"/>
+                </a:solidFill>
+                <a:latin typeface="Inter"/>
+              </a:defRPr>
+            </a:pPr>
+            <a:r>
+              <a:t>Significant LOF → model is missing important terms</a:t>
+            </a:r>
+          </a:p>
+        </p:txBody>
+      </p:sp>
+      <p:sp>
+        <p:nvSpPr>
+          <p:cNvPr id="6" name="TextBox 5"/>
+          <p:cNvSpPr txBox="1"/>
+          <p:nvPr/>
+        </p:nvSpPr>
+        <p:spPr>
+          <a:xfrm>
+            <a:off x="731520" y="6400800"/>
+            <a:ext cx="10058400" cy="365760"/>
+          </a:xfrm>
+          <a:prstGeom prst="rect">
+            <a:avLst/>
+          </a:prstGeom>
+          <a:noFill/>
+        </p:spPr>
+        <p:txBody>
+          <a:bodyPr wrap="square">
+            <a:spAutoFit/>
+          </a:bodyPr>
+          <a:lstStyle/>
+          <a:p>
+            <a:pPr algn="l">
+              <a:defRPr sz="1000" b="0">
+                <a:solidFill>
+                  <a:srgbClr val="999999"/>
+                </a:solidFill>
+                <a:latin typeface="Consolas"/>
+              </a:defRPr>
+            </a:pPr>
+            <a:r>
+              <a:t>© 2026 Martin J. Gallagher  |  GPL-3.0-or-later  |  doehelper.com</a:t>
             </a:r>
           </a:p>
         </p:txBody>
@@ -6457,7 +7785,7 @@
     <p:bg>
       <p:bgPr>
         <a:solidFill>
-          <a:srgbClr val="FFFFFF"/>
+          <a:srgbClr val="FAFAFA"/>
         </a:solidFill>
         <a:effectLst/>
       </p:bgPr>
@@ -6478,13 +7806,13 @@
         <p:spPr>
           <a:xfrm>
             <a:off x="0" y="0"/>
-            <a:ext cx="12191695" cy="54864"/>
+            <a:ext cx="12191695" cy="45720"/>
           </a:xfrm>
           <a:prstGeom prst="rect">
             <a:avLst/>
           </a:prstGeom>
           <a:solidFill>
-            <a:srgbClr val="007BFF"/>
+            <a:srgbClr val="0D9488"/>
           </a:solidFill>
           <a:ln>
             <a:noFill/>
@@ -6520,8 +7848,8 @@
         </p:nvSpPr>
         <p:spPr>
           <a:xfrm>
-            <a:off x="731520" y="365760"/>
-            <a:ext cx="10515600" cy="822960"/>
+            <a:off x="777240" y="320040"/>
+            <a:ext cx="10058400" cy="548640"/>
           </a:xfrm>
           <a:prstGeom prst="rect">
             <a:avLst/>
@@ -6534,30 +7862,319 @@
           </a:bodyPr>
           <a:lstStyle/>
           <a:p>
+            <a:pPr algn="l">
+              <a:defRPr sz="2600" b="1">
+                <a:solidFill>
+                  <a:srgbClr val="111111"/>
+                </a:solidFill>
+                <a:latin typeface="Inter"/>
+              </a:defRPr>
+            </a:pPr>
+            <a:r>
+              <a:t>doe analyze in Practice</a:t>
+            </a:r>
+          </a:p>
+        </p:txBody>
+      </p:sp>
+      <p:sp>
+        <p:nvSpPr>
+          <p:cNvPr id="4" name="Rectangle 3"/>
+          <p:cNvSpPr/>
+          <p:nvPr/>
+        </p:nvSpPr>
+        <p:spPr>
+          <a:xfrm>
+            <a:off x="548640" y="1051560"/>
+            <a:ext cx="10972800" cy="320040"/>
+          </a:xfrm>
+          <a:prstGeom prst="rect">
+            <a:avLst/>
+          </a:prstGeom>
+          <a:solidFill>
+            <a:srgbClr val="222222"/>
+          </a:solidFill>
+          <a:ln>
+            <a:noFill/>
+          </a:ln>
+        </p:spPr>
+        <p:style>
+          <a:lnRef idx="1">
+            <a:schemeClr val="accent1"/>
+          </a:lnRef>
+          <a:fillRef idx="3">
+            <a:schemeClr val="accent1"/>
+          </a:fillRef>
+          <a:effectRef idx="2">
+            <a:schemeClr val="accent1"/>
+          </a:effectRef>
+          <a:fontRef idx="minor">
+            <a:schemeClr val="lt1"/>
+          </a:fontRef>
+        </p:style>
+        <p:txBody>
+          <a:bodyPr rtlCol="0" anchor="ctr"/>
+          <a:lstStyle/>
+          <a:p>
+            <a:pPr algn="ctr"/>
+          </a:p>
+        </p:txBody>
+      </p:sp>
+      <p:sp>
+        <p:nvSpPr>
+          <p:cNvPr id="5" name="TextBox 4"/>
+          <p:cNvSpPr txBox="1"/>
+          <p:nvPr/>
+        </p:nvSpPr>
+        <p:spPr>
+          <a:xfrm>
+            <a:off x="822960" y="1051560"/>
+            <a:ext cx="3657600" cy="320040"/>
+          </a:xfrm>
+          <a:prstGeom prst="rect">
+            <a:avLst/>
+          </a:prstGeom>
+          <a:noFill/>
+        </p:spPr>
+        <p:txBody>
+          <a:bodyPr wrap="square" anchor="ctr">
+            <a:spAutoFit/>
+          </a:bodyPr>
+          <a:lstStyle/>
+          <a:p>
+            <a:pPr algn="l">
+              <a:defRPr sz="1000" b="0">
+                <a:solidFill>
+                  <a:srgbClr val="999999"/>
+                </a:solidFill>
+                <a:latin typeface="Consolas"/>
+              </a:defRPr>
+            </a:pPr>
+            <a:r>
+              <a:t>terminal</a:t>
+            </a:r>
+          </a:p>
+        </p:txBody>
+      </p:sp>
+      <p:sp>
+        <p:nvSpPr>
+          <p:cNvPr id="6" name="Rounded Rectangle 5"/>
+          <p:cNvSpPr/>
+          <p:nvPr/>
+        </p:nvSpPr>
+        <p:spPr>
+          <a:xfrm>
+            <a:off x="548640" y="1371600"/>
+            <a:ext cx="10972800" cy="4389120"/>
+          </a:xfrm>
+          <a:prstGeom prst="roundRect">
+            <a:avLst/>
+          </a:prstGeom>
+          <a:solidFill>
+            <a:srgbClr val="1A1A1A"/>
+          </a:solidFill>
+          <a:ln>
+            <a:noFill/>
+          </a:ln>
+        </p:spPr>
+        <p:style>
+          <a:lnRef idx="1">
+            <a:schemeClr val="accent1"/>
+          </a:lnRef>
+          <a:fillRef idx="3">
+            <a:schemeClr val="accent1"/>
+          </a:fillRef>
+          <a:effectRef idx="2">
+            <a:schemeClr val="accent1"/>
+          </a:effectRef>
+          <a:fontRef idx="minor">
+            <a:schemeClr val="lt1"/>
+          </a:fontRef>
+        </p:style>
+        <p:txBody>
+          <a:bodyPr rtlCol="0" anchor="ctr" wrap="square" lIns="274320" tIns="182880" rIns="274320"/>
+          <a:lstStyle/>
+          <a:p>
+            <a:pPr algn="ctr">
+              <a:spcAft>
+                <a:spcPts val="100"/>
+              </a:spcAft>
+              <a:defRPr sz="1500">
+                <a:solidFill>
+                  <a:srgbClr val="6EC86E"/>
+                </a:solidFill>
+                <a:latin typeface="Consolas"/>
+              </a:defRPr>
+            </a:pPr>
+            <a:r>
+              <a:t>$ doe analyze reactor_rsm/</a:t>
+            </a:r>
+          </a:p>
+          <a:p>
             <a:pPr>
-              <a:defRPr sz="3200" b="1">
-                <a:solidFill>
-                  <a:srgbClr val="222222"/>
-                </a:solidFill>
-                <a:latin typeface="Calibri"/>
-              </a:defRPr>
-            </a:pPr>
-            <a:r>
-              <a:t>Model Adequacy Statistics</a:t>
-            </a:r>
-          </a:p>
-        </p:txBody>
-      </p:sp>
-      <p:sp>
-        <p:nvSpPr>
-          <p:cNvPr id="4" name="TextBox 3"/>
+              <a:spcAft>
+                <a:spcPts val="100"/>
+              </a:spcAft>
+              <a:defRPr sz="1500">
+                <a:solidFill>
+                  <a:srgbClr val="CCCCCC"/>
+                </a:solidFill>
+                <a:latin typeface="Consolas"/>
+              </a:defRPr>
+            </a:pPr>
+          </a:p>
+          <a:p>
+            <a:pPr>
+              <a:spcAft>
+                <a:spcPts val="100"/>
+              </a:spcAft>
+              <a:defRPr sz="1500">
+                <a:solidFill>
+                  <a:srgbClr val="CCCCCC"/>
+                </a:solidFill>
+                <a:latin typeface="Consolas"/>
+              </a:defRPr>
+            </a:pPr>
+            <a:r>
+              <a:t>ANOVA Table</a:t>
+            </a:r>
+          </a:p>
+          <a:p>
+            <a:pPr>
+              <a:spcAft>
+                <a:spcPts val="100"/>
+              </a:spcAft>
+              <a:defRPr sz="1500">
+                <a:solidFill>
+                  <a:srgbClr val="CCCCCC"/>
+                </a:solidFill>
+                <a:latin typeface="Consolas"/>
+              </a:defRPr>
+            </a:pPr>
+            <a:r>
+              <a:t>  Source        SS       DF    MS       F       p-value  Sig</a:t>
+            </a:r>
+          </a:p>
+          <a:p>
+            <a:pPr>
+              <a:spcAft>
+                <a:spcPts val="100"/>
+              </a:spcAft>
+              <a:defRPr sz="1500">
+                <a:solidFill>
+                  <a:srgbClr val="CCCCCC"/>
+                </a:solidFill>
+                <a:latin typeface="Consolas"/>
+              </a:defRPr>
+            </a:pPr>
+            <a:r>
+              <a:t>  temperature   1240.5   1    1240.5   45.2    0.0001   ***</a:t>
+            </a:r>
+          </a:p>
+          <a:p>
+            <a:pPr>
+              <a:spcAft>
+                <a:spcPts val="100"/>
+              </a:spcAft>
+              <a:defRPr sz="1500">
+                <a:solidFill>
+                  <a:srgbClr val="CCCCCC"/>
+                </a:solidFill>
+                <a:latin typeface="Consolas"/>
+              </a:defRPr>
+            </a:pPr>
+            <a:r>
+              <a:t>  pressure       890.3   1     890.3   32.4    0.0005   ***</a:t>
+            </a:r>
+          </a:p>
+          <a:p>
+            <a:pPr>
+              <a:spcAft>
+                <a:spcPts val="100"/>
+              </a:spcAft>
+              <a:defRPr sz="1500">
+                <a:solidFill>
+                  <a:srgbClr val="CCCCCC"/>
+                </a:solidFill>
+                <a:latin typeface="Consolas"/>
+              </a:defRPr>
+            </a:pPr>
+            <a:r>
+              <a:t>  catalyst        45.2   1      45.2    1.6    0.2345</a:t>
+            </a:r>
+          </a:p>
+          <a:p>
+            <a:pPr>
+              <a:spcAft>
+                <a:spcPts val="100"/>
+              </a:spcAft>
+              <a:defRPr sz="1500">
+                <a:solidFill>
+                  <a:srgbClr val="CCCCCC"/>
+                </a:solidFill>
+                <a:latin typeface="Consolas"/>
+              </a:defRPr>
+            </a:pPr>
+            <a:r>
+              <a:t>  temp*press     320.1   1     320.1   11.7    0.0089   **</a:t>
+            </a:r>
+          </a:p>
+          <a:p>
+            <a:pPr>
+              <a:spcAft>
+                <a:spcPts val="100"/>
+              </a:spcAft>
+              <a:defRPr sz="1500">
+                <a:solidFill>
+                  <a:srgbClr val="CCCCCC"/>
+                </a:solidFill>
+                <a:latin typeface="Consolas"/>
+              </a:defRPr>
+            </a:pPr>
+            <a:r>
+              <a:t>  temp^2         156.7   1     156.7    5.7    0.0412   *</a:t>
+            </a:r>
+          </a:p>
+          <a:p>
+            <a:pPr>
+              <a:spcAft>
+                <a:spcPts val="100"/>
+              </a:spcAft>
+              <a:defRPr sz="1500">
+                <a:solidFill>
+                  <a:srgbClr val="CCCCCC"/>
+                </a:solidFill>
+                <a:latin typeface="Consolas"/>
+              </a:defRPr>
+            </a:pPr>
+          </a:p>
+          <a:p>
+            <a:pPr>
+              <a:spcAft>
+                <a:spcPts val="100"/>
+              </a:spcAft>
+              <a:defRPr sz="1500">
+                <a:solidFill>
+                  <a:srgbClr val="CCCCCC"/>
+                </a:solidFill>
+                <a:latin typeface="Consolas"/>
+              </a:defRPr>
+            </a:pPr>
+            <a:r>
+              <a:t>Model: R^2 = 0.967   Adj R^2 = 0.945   Pred R^2 = 0.912</a:t>
+            </a:r>
+          </a:p>
+        </p:txBody>
+      </p:sp>
+      <p:sp>
+        <p:nvSpPr>
+          <p:cNvPr id="7" name="TextBox 6"/>
           <p:cNvSpPr txBox="1"/>
           <p:nvPr/>
         </p:nvSpPr>
         <p:spPr>
           <a:xfrm>
-            <a:off x="914400" y="1463040"/>
-            <a:ext cx="10058400" cy="4754880"/>
+            <a:off x="731520" y="6400800"/>
+            <a:ext cx="10058400" cy="365760"/>
           </a:xfrm>
           <a:prstGeom prst="rect">
             <a:avLst/>
@@ -6570,131 +8187,16 @@
           </a:bodyPr>
           <a:lstStyle/>
           <a:p>
-            <a:pPr>
-              <a:spcAft>
-                <a:spcPts val="800"/>
-              </a:spcAft>
-              <a:defRPr sz="2200" b="0">
-                <a:solidFill>
-                  <a:srgbClr val="222222"/>
-                </a:solidFill>
-                <a:latin typeface="Calibri"/>
-              </a:defRPr>
-            </a:pPr>
-            <a:r>
-              <a:t>R-squared: fraction of variability explained (0 to 1)</a:t>
-            </a:r>
-          </a:p>
-          <a:p>
-            <a:pPr lvl="1">
-              <a:spcAft>
-                <a:spcPts val="800"/>
-              </a:spcAft>
-              <a:defRPr sz="1900">
-                <a:solidFill>
-                  <a:srgbClr val="222222"/>
-                </a:solidFill>
-                <a:latin typeface="Calibri"/>
-              </a:defRPr>
-            </a:pPr>
-            <a:r>
-              <a:t>R^2 &gt; 0.9 is generally good</a:t>
-            </a:r>
-          </a:p>
-          <a:p>
-            <a:pPr>
-              <a:spcAft>
-                <a:spcPts val="800"/>
-              </a:spcAft>
-              <a:defRPr sz="2200" b="0">
-                <a:solidFill>
-                  <a:srgbClr val="222222"/>
-                </a:solidFill>
-                <a:latin typeface="Calibri"/>
-              </a:defRPr>
-            </a:pPr>
-            <a:r>
-              <a:t>Adjusted R-squared: penalised for number of terms</a:t>
-            </a:r>
-          </a:p>
-          <a:p>
-            <a:pPr lvl="1">
-              <a:spcAft>
-                <a:spcPts val="800"/>
-              </a:spcAft>
-              <a:defRPr sz="1900">
-                <a:solidFill>
-                  <a:srgbClr val="222222"/>
-                </a:solidFill>
-                <a:latin typeface="Calibri"/>
-              </a:defRPr>
-            </a:pPr>
-            <a:r>
-              <a:t>Should be close to R^2 (large gap = overfitting)</a:t>
-            </a:r>
-          </a:p>
-          <a:p>
-            <a:pPr>
-              <a:spcAft>
-                <a:spcPts val="800"/>
-              </a:spcAft>
-              <a:defRPr sz="2200" b="0">
-                <a:solidFill>
-                  <a:srgbClr val="222222"/>
-                </a:solidFill>
-                <a:latin typeface="Calibri"/>
-              </a:defRPr>
-            </a:pPr>
-            <a:r>
-              <a:t>Predicted R-squared (PRESS-based): cross-validation metric</a:t>
-            </a:r>
-          </a:p>
-          <a:p>
-            <a:pPr lvl="1">
-              <a:spcAft>
-                <a:spcPts val="800"/>
-              </a:spcAft>
-              <a:defRPr sz="1900">
-                <a:solidFill>
-                  <a:srgbClr val="222222"/>
-                </a:solidFill>
-                <a:latin typeface="Calibri"/>
-              </a:defRPr>
-            </a:pPr>
-            <a:r>
-              <a:t>Should agree with Adj R^2 within ~0.2</a:t>
-            </a:r>
-          </a:p>
-          <a:p>
-            <a:pPr>
-              <a:spcAft>
-                <a:spcPts val="800"/>
-              </a:spcAft>
-              <a:defRPr sz="2200" b="0">
-                <a:solidFill>
-                  <a:srgbClr val="222222"/>
-                </a:solidFill>
-                <a:latin typeface="Calibri"/>
-              </a:defRPr>
-            </a:pPr>
-            <a:r>
-              <a:t>Lack-of-Fit test: is the model adequate?</a:t>
-            </a:r>
-          </a:p>
-          <a:p>
-            <a:pPr lvl="1">
-              <a:spcAft>
-                <a:spcPts val="800"/>
-              </a:spcAft>
-              <a:defRPr sz="1900">
-                <a:solidFill>
-                  <a:srgbClr val="222222"/>
-                </a:solidFill>
-                <a:latin typeface="Calibri"/>
-              </a:defRPr>
-            </a:pPr>
-            <a:r>
-              <a:t>Significant LOF -&gt; model is missing important terms</a:t>
+            <a:pPr algn="l">
+              <a:defRPr sz="1000" b="0">
+                <a:solidFill>
+                  <a:srgbClr val="999999"/>
+                </a:solidFill>
+                <a:latin typeface="Consolas"/>
+              </a:defRPr>
+            </a:pPr>
+            <a:r>
+              <a:t>© 2026 Martin J. Gallagher  |  GPL-3.0-or-later  |  doehelper.com</a:t>
             </a:r>
           </a:p>
         </p:txBody>
